--- a/1 am/2 نظام التشغيل/cours 6/عرض الدرس.pptx
+++ b/1 am/2 نظام التشغيل/cours 6/عرض الدرس.pptx
@@ -8,9 +8,10 @@
     <p:sldId id="256" r:id="rId2"/>
     <p:sldId id="263" r:id="rId3"/>
     <p:sldId id="262" r:id="rId4"/>
-    <p:sldId id="261" r:id="rId5"/>
-    <p:sldId id="264" r:id="rId6"/>
-    <p:sldId id="259" r:id="rId7"/>
+    <p:sldId id="265" r:id="rId5"/>
+    <p:sldId id="261" r:id="rId6"/>
+    <p:sldId id="264" r:id="rId7"/>
+    <p:sldId id="259" r:id="rId8"/>
   </p:sldIdLst>
   <p:sldSz cx="12192000" cy="6858000"/>
   <p:notesSz cx="6858000" cy="9144000"/>
@@ -248,7 +249,7 @@
           <a:p>
             <a:fld id="{33E46DBA-FA3B-4C5F-B700-4671668DAB72}" type="datetimeFigureOut">
               <a:rPr lang="fr-FR" smtClean="0"/>
-              <a:t>13/01/2025</a:t>
+              <a:t>14/01/2025</a:t>
             </a:fld>
             <a:endParaRPr lang="fr-FR"/>
           </a:p>
@@ -418,7 +419,7 @@
           <a:p>
             <a:fld id="{33E46DBA-FA3B-4C5F-B700-4671668DAB72}" type="datetimeFigureOut">
               <a:rPr lang="fr-FR" smtClean="0"/>
-              <a:t>13/01/2025</a:t>
+              <a:t>14/01/2025</a:t>
             </a:fld>
             <a:endParaRPr lang="fr-FR"/>
           </a:p>
@@ -598,7 +599,7 @@
           <a:p>
             <a:fld id="{33E46DBA-FA3B-4C5F-B700-4671668DAB72}" type="datetimeFigureOut">
               <a:rPr lang="fr-FR" smtClean="0"/>
-              <a:t>13/01/2025</a:t>
+              <a:t>14/01/2025</a:t>
             </a:fld>
             <a:endParaRPr lang="fr-FR"/>
           </a:p>
@@ -768,7 +769,7 @@
           <a:p>
             <a:fld id="{33E46DBA-FA3B-4C5F-B700-4671668DAB72}" type="datetimeFigureOut">
               <a:rPr lang="fr-FR" smtClean="0"/>
-              <a:t>13/01/2025</a:t>
+              <a:t>14/01/2025</a:t>
             </a:fld>
             <a:endParaRPr lang="fr-FR"/>
           </a:p>
@@ -1014,7 +1015,7 @@
           <a:p>
             <a:fld id="{33E46DBA-FA3B-4C5F-B700-4671668DAB72}" type="datetimeFigureOut">
               <a:rPr lang="fr-FR" smtClean="0"/>
-              <a:t>13/01/2025</a:t>
+              <a:t>14/01/2025</a:t>
             </a:fld>
             <a:endParaRPr lang="fr-FR"/>
           </a:p>
@@ -1246,7 +1247,7 @@
           <a:p>
             <a:fld id="{33E46DBA-FA3B-4C5F-B700-4671668DAB72}" type="datetimeFigureOut">
               <a:rPr lang="fr-FR" smtClean="0"/>
-              <a:t>13/01/2025</a:t>
+              <a:t>14/01/2025</a:t>
             </a:fld>
             <a:endParaRPr lang="fr-FR"/>
           </a:p>
@@ -1613,7 +1614,7 @@
           <a:p>
             <a:fld id="{33E46DBA-FA3B-4C5F-B700-4671668DAB72}" type="datetimeFigureOut">
               <a:rPr lang="fr-FR" smtClean="0"/>
-              <a:t>13/01/2025</a:t>
+              <a:t>14/01/2025</a:t>
             </a:fld>
             <a:endParaRPr lang="fr-FR"/>
           </a:p>
@@ -1731,7 +1732,7 @@
           <a:p>
             <a:fld id="{33E46DBA-FA3B-4C5F-B700-4671668DAB72}" type="datetimeFigureOut">
               <a:rPr lang="fr-FR" smtClean="0"/>
-              <a:t>13/01/2025</a:t>
+              <a:t>14/01/2025</a:t>
             </a:fld>
             <a:endParaRPr lang="fr-FR"/>
           </a:p>
@@ -1826,7 +1827,7 @@
           <a:p>
             <a:fld id="{33E46DBA-FA3B-4C5F-B700-4671668DAB72}" type="datetimeFigureOut">
               <a:rPr lang="fr-FR" smtClean="0"/>
-              <a:t>13/01/2025</a:t>
+              <a:t>14/01/2025</a:t>
             </a:fld>
             <a:endParaRPr lang="fr-FR"/>
           </a:p>
@@ -2103,7 +2104,7 @@
           <a:p>
             <a:fld id="{33E46DBA-FA3B-4C5F-B700-4671668DAB72}" type="datetimeFigureOut">
               <a:rPr lang="fr-FR" smtClean="0"/>
-              <a:t>13/01/2025</a:t>
+              <a:t>14/01/2025</a:t>
             </a:fld>
             <a:endParaRPr lang="fr-FR"/>
           </a:p>
@@ -2356,7 +2357,7 @@
           <a:p>
             <a:fld id="{33E46DBA-FA3B-4C5F-B700-4671668DAB72}" type="datetimeFigureOut">
               <a:rPr lang="fr-FR" smtClean="0"/>
-              <a:t>13/01/2025</a:t>
+              <a:t>14/01/2025</a:t>
             </a:fld>
             <a:endParaRPr lang="fr-FR"/>
           </a:p>
@@ -2569,7 +2570,7 @@
           <a:p>
             <a:fld id="{33E46DBA-FA3B-4C5F-B700-4671668DAB72}" type="datetimeFigureOut">
               <a:rPr lang="fr-FR" smtClean="0"/>
-              <a:t>13/01/2025</a:t>
+              <a:t>14/01/2025</a:t>
             </a:fld>
             <a:endParaRPr lang="fr-FR"/>
           </a:p>
@@ -3638,6 +3639,269 @@
           </a:p>
         </p:txBody>
       </p:sp>
+      <p:sp>
+        <p:nvSpPr>
+          <p:cNvPr id="19" name="ZoneTexte 18"/>
+          <p:cNvSpPr txBox="1"/>
+          <p:nvPr/>
+        </p:nvSpPr>
+        <p:spPr>
+          <a:xfrm>
+            <a:off x="538619" y="1327760"/>
+            <a:ext cx="11348581" cy="4031873"/>
+          </a:xfrm>
+          <a:prstGeom prst="rect">
+            <a:avLst/>
+          </a:prstGeom>
+          <a:noFill/>
+        </p:spPr>
+        <p:txBody>
+          <a:bodyPr wrap="square" rtlCol="1">
+            <a:spAutoFit/>
+          </a:bodyPr>
+          <a:lstStyle/>
+          <a:p>
+            <a:pPr marL="457200" indent="-457200" algn="r" rtl="1">
+              <a:buFont typeface="Wingdings" panose="05000000000000000000" pitchFamily="2" charset="2"/>
+              <a:buChar char="Ø"/>
+            </a:pPr>
+            <a:r>
+              <a:rPr lang="ar-DZ" sz="3200" dirty="0" smtClean="0"/>
+              <a:t>قم </a:t>
+            </a:r>
+            <a:r>
+              <a:rPr lang="ar-DZ" sz="3200" dirty="0"/>
+              <a:t>بفتح </a:t>
+            </a:r>
+            <a:r>
+              <a:rPr lang="ar-DZ" sz="3200" dirty="0" smtClean="0"/>
+              <a:t>أيقونة </a:t>
+            </a:r>
+            <a:r>
+              <a:rPr lang="fr-FR" sz="3200" dirty="0" smtClean="0"/>
+              <a:t>Ce </a:t>
+            </a:r>
+            <a:r>
+              <a:rPr lang="fr-FR" sz="3200" dirty="0"/>
+              <a:t>PC </a:t>
+            </a:r>
+            <a:r>
+              <a:rPr lang="fr-FR" sz="3200" dirty="0" smtClean="0"/>
+              <a:t>، </a:t>
+            </a:r>
+            <a:r>
+              <a:rPr lang="ar-DZ" sz="3200" dirty="0" smtClean="0"/>
+              <a:t>و تمعن فيها جيّدا.</a:t>
+            </a:r>
+          </a:p>
+          <a:p>
+            <a:pPr marL="457200" indent="-457200" algn="r" rtl="1">
+              <a:buFont typeface="Wingdings" panose="05000000000000000000" pitchFamily="2" charset="2"/>
+              <a:buChar char="Ø"/>
+            </a:pPr>
+            <a:r>
+              <a:rPr lang="ar-DZ" sz="3200" dirty="0" smtClean="0"/>
+              <a:t>اضغط </a:t>
+            </a:r>
+            <a:r>
+              <a:rPr lang="ar-DZ" sz="3200" dirty="0"/>
+              <a:t>على زر التكبير أكثر من </a:t>
+            </a:r>
+            <a:r>
+              <a:rPr lang="ar-DZ" sz="3200" dirty="0" smtClean="0"/>
+              <a:t>مرّة.</a:t>
+            </a:r>
+          </a:p>
+          <a:p>
+            <a:pPr marL="457200" indent="-457200" algn="r" rtl="1">
+              <a:buFont typeface="Wingdings" panose="05000000000000000000" pitchFamily="2" charset="2"/>
+              <a:buChar char="Ø"/>
+            </a:pPr>
+            <a:r>
+              <a:rPr lang="ar-DZ" sz="3200" dirty="0" smtClean="0"/>
+              <a:t> اضغط </a:t>
+            </a:r>
+            <a:r>
+              <a:rPr lang="ar-DZ" sz="3200" dirty="0"/>
+              <a:t>على زر التقليص و </a:t>
+            </a:r>
+            <a:r>
+              <a:rPr lang="ar-DZ" sz="3200" dirty="0" smtClean="0"/>
+              <a:t>لاحظ </a:t>
+            </a:r>
+            <a:r>
+              <a:rPr lang="ar-DZ" sz="3200" dirty="0"/>
+              <a:t>ما </a:t>
+            </a:r>
+            <a:r>
+              <a:rPr lang="ar-DZ" sz="3200" dirty="0" smtClean="0"/>
+              <a:t>يحدث</a:t>
+            </a:r>
+            <a:r>
+              <a:rPr lang="ar-DZ" sz="3200" dirty="0"/>
+              <a:t>.</a:t>
+            </a:r>
+            <a:endParaRPr lang="ar-DZ" sz="3200" dirty="0" smtClean="0"/>
+          </a:p>
+          <a:p>
+            <a:pPr marL="457200" indent="-457200" algn="r" rtl="1">
+              <a:buFont typeface="Wingdings" panose="05000000000000000000" pitchFamily="2" charset="2"/>
+              <a:buChar char="Ø"/>
+            </a:pPr>
+            <a:r>
+              <a:rPr lang="ar-DZ" sz="3200" dirty="0" smtClean="0"/>
+              <a:t>اعد </a:t>
+            </a:r>
+            <a:r>
+              <a:rPr lang="ar-DZ" sz="3200" dirty="0"/>
+              <a:t>إظهار النافذة عبر شريط المهام، ا</a:t>
+            </a:r>
+            <a:r>
+              <a:rPr lang="ar-DZ" sz="3200" dirty="0" smtClean="0"/>
+              <a:t>ضغط </a:t>
+            </a:r>
+            <a:r>
+              <a:rPr lang="ar-DZ" sz="3200" dirty="0"/>
+              <a:t>على زر </a:t>
+            </a:r>
+            <a:r>
+              <a:rPr lang="ar-DZ" sz="3200" dirty="0" smtClean="0"/>
+              <a:t>الغلق.</a:t>
+            </a:r>
+          </a:p>
+          <a:p>
+            <a:pPr algn="r" rtl="1"/>
+            <a:endParaRPr lang="ar-DZ" sz="3200" dirty="0" smtClean="0"/>
+          </a:p>
+          <a:p>
+            <a:pPr marL="457200" indent="-457200" algn="r" rtl="1">
+              <a:buFont typeface="Wingdings" panose="05000000000000000000" pitchFamily="2" charset="2"/>
+              <a:buChar char="Ø"/>
+            </a:pPr>
+            <a:r>
+              <a:rPr lang="ar-DZ" sz="3200" dirty="0" smtClean="0"/>
+              <a:t> قم بفتح برنامج </a:t>
+            </a:r>
+            <a:r>
+              <a:rPr lang="fr-FR" sz="3200" dirty="0" err="1" smtClean="0"/>
+              <a:t>Paint</a:t>
+            </a:r>
+            <a:r>
+              <a:rPr lang="fr-FR" sz="3200" dirty="0" smtClean="0"/>
+              <a:t> </a:t>
+            </a:r>
+            <a:r>
+              <a:rPr lang="ar-DZ" sz="3200" dirty="0" smtClean="0"/>
+              <a:t> و إنشاء رسم بسيط لأحد مكونات الحاسوب.</a:t>
+            </a:r>
+          </a:p>
+          <a:p>
+            <a:pPr marL="457200" indent="-457200" algn="r" rtl="1">
+              <a:buFont typeface="Wingdings" panose="05000000000000000000" pitchFamily="2" charset="2"/>
+              <a:buChar char="Ø"/>
+            </a:pPr>
+            <a:r>
+              <a:rPr lang="ar-DZ" sz="3200" dirty="0" smtClean="0"/>
+              <a:t>اضغط على زر الغلق.</a:t>
+            </a:r>
+          </a:p>
+          <a:p>
+            <a:pPr marL="457200" indent="-457200" algn="r" rtl="1">
+              <a:buFont typeface="Wingdings" panose="05000000000000000000" pitchFamily="2" charset="2"/>
+              <a:buChar char="Ø"/>
+            </a:pPr>
+            <a:r>
+              <a:rPr lang="ar-DZ" sz="3200" dirty="0" smtClean="0"/>
+              <a:t> تمعّن جيّدا في الإطار الذي خرج.</a:t>
+            </a:r>
+          </a:p>
+        </p:txBody>
+      </p:sp>
+    </p:spTree>
+    <p:extLst>
+      <p:ext uri="{BB962C8B-B14F-4D97-AF65-F5344CB8AC3E}">
+        <p14:creationId xmlns:p14="http://schemas.microsoft.com/office/powerpoint/2010/main" val="2217613158"/>
+      </p:ext>
+    </p:extLst>
+  </p:cSld>
+  <p:clrMapOvr>
+    <a:masterClrMapping/>
+  </p:clrMapOvr>
+  <p:transition spd="slow">
+    <p:push dir="u"/>
+  </p:transition>
+  <p:timing>
+    <p:tnLst>
+      <p:par>
+        <p:cTn id="1" dur="indefinite" restart="never" nodeType="tmRoot"/>
+      </p:par>
+    </p:tnLst>
+  </p:timing>
+</p:sld>
+</file>
+
+<file path=ppt/slides/slide4.xml><?xml version="1.0" encoding="utf-8"?>
+<p:sld xmlns:a="http://schemas.openxmlformats.org/drawingml/2006/main" xmlns:r="http://schemas.openxmlformats.org/officeDocument/2006/relationships" xmlns:p="http://schemas.openxmlformats.org/presentationml/2006/main">
+  <p:cSld>
+    <p:spTree>
+      <p:nvGrpSpPr>
+        <p:cNvPr id="1" name=""/>
+        <p:cNvGrpSpPr/>
+        <p:nvPr/>
+      </p:nvGrpSpPr>
+      <p:grpSpPr>
+        <a:xfrm>
+          <a:off x="0" y="0"/>
+          <a:ext cx="0" cy="0"/>
+          <a:chOff x="0" y="0"/>
+          <a:chExt cx="0" cy="0"/>
+        </a:xfrm>
+      </p:grpSpPr>
+      <p:sp>
+        <p:nvSpPr>
+          <p:cNvPr id="13" name="Rectangle 12"/>
+          <p:cNvSpPr/>
+          <p:nvPr/>
+        </p:nvSpPr>
+        <p:spPr>
+          <a:xfrm>
+            <a:off x="375781" y="78747"/>
+            <a:ext cx="11511419" cy="622799"/>
+          </a:xfrm>
+          <a:prstGeom prst="rect">
+            <a:avLst/>
+          </a:prstGeom>
+        </p:spPr>
+        <p:txBody>
+          <a:bodyPr wrap="square">
+            <a:spAutoFit/>
+          </a:bodyPr>
+          <a:lstStyle/>
+          <a:p>
+            <a:pPr algn="r" rtl="1">
+              <a:lnSpc>
+                <a:spcPct val="115000"/>
+              </a:lnSpc>
+              <a:spcAft>
+                <a:spcPts val="1000"/>
+              </a:spcAft>
+            </a:pPr>
+            <a:r>
+              <a:rPr lang="ar-DZ" sz="3200" b="1" u="sng" dirty="0" smtClean="0">
+                <a:solidFill>
+                  <a:srgbClr val="FF0000"/>
+                </a:solidFill>
+                <a:effectLst/>
+                <a:latin typeface="Calibri" panose="020F0502020204030204" pitchFamily="34" charset="0"/>
+                <a:ea typeface="Times New Roman" panose="02020603050405020304" pitchFamily="18" charset="0"/>
+                <a:cs typeface="Times New Roman" panose="02020603050405020304" pitchFamily="18" charset="0"/>
+              </a:rPr>
+              <a:t>نشاط :</a:t>
+            </a:r>
+            <a:endParaRPr lang="fr-FR" sz="3200" dirty="0"/>
+          </a:p>
+        </p:txBody>
+      </p:sp>
       <p:pic>
         <p:nvPicPr>
           <p:cNvPr id="3" name="Image 2"/>
@@ -3698,10 +3962,175 @@
           </a:ln>
         </p:spPr>
       </p:pic>
+      <p:cxnSp>
+        <p:nvCxnSpPr>
+          <p:cNvPr id="6" name="Connecteur droit avec flèche 5"/>
+          <p:cNvCxnSpPr/>
+          <p:nvPr/>
+        </p:nvCxnSpPr>
+        <p:spPr>
+          <a:xfrm flipH="1">
+            <a:off x="4196219" y="1691014"/>
+            <a:ext cx="3695178" cy="2467627"/>
+          </a:xfrm>
+          <a:prstGeom prst="straightConnector1">
+            <a:avLst/>
+          </a:prstGeom>
+          <a:ln>
+            <a:tailEnd type="triangle"/>
+          </a:ln>
+        </p:spPr>
+        <p:style>
+          <a:lnRef idx="3">
+            <a:schemeClr val="dk1"/>
+          </a:lnRef>
+          <a:fillRef idx="0">
+            <a:schemeClr val="dk1"/>
+          </a:fillRef>
+          <a:effectRef idx="2">
+            <a:schemeClr val="dk1"/>
+          </a:effectRef>
+          <a:fontRef idx="minor">
+            <a:schemeClr val="tx1"/>
+          </a:fontRef>
+        </p:style>
+      </p:cxnSp>
+      <p:cxnSp>
+        <p:nvCxnSpPr>
+          <p:cNvPr id="8" name="Connecteur droit avec flèche 7"/>
+          <p:cNvCxnSpPr/>
+          <p:nvPr/>
+        </p:nvCxnSpPr>
+        <p:spPr>
+          <a:xfrm>
+            <a:off x="6131490" y="1691014"/>
+            <a:ext cx="1008346" cy="2279736"/>
+          </a:xfrm>
+          <a:prstGeom prst="straightConnector1">
+            <a:avLst/>
+          </a:prstGeom>
+          <a:ln>
+            <a:tailEnd type="triangle"/>
+          </a:ln>
+        </p:spPr>
+        <p:style>
+          <a:lnRef idx="3">
+            <a:schemeClr val="dk1"/>
+          </a:lnRef>
+          <a:fillRef idx="0">
+            <a:schemeClr val="dk1"/>
+          </a:fillRef>
+          <a:effectRef idx="2">
+            <a:schemeClr val="dk1"/>
+          </a:effectRef>
+          <a:fontRef idx="minor">
+            <a:schemeClr val="tx1"/>
+          </a:fontRef>
+        </p:style>
+      </p:cxnSp>
+      <p:cxnSp>
+        <p:nvCxnSpPr>
+          <p:cNvPr id="10" name="Connecteur droit avec flèche 9"/>
+          <p:cNvCxnSpPr/>
+          <p:nvPr/>
+        </p:nvCxnSpPr>
+        <p:spPr>
+          <a:xfrm>
+            <a:off x="3795386" y="1578279"/>
+            <a:ext cx="187891" cy="3858017"/>
+          </a:xfrm>
+          <a:prstGeom prst="straightConnector1">
+            <a:avLst/>
+          </a:prstGeom>
+          <a:ln>
+            <a:tailEnd type="triangle"/>
+          </a:ln>
+        </p:spPr>
+        <p:style>
+          <a:lnRef idx="3">
+            <a:schemeClr val="dk1"/>
+          </a:lnRef>
+          <a:fillRef idx="0">
+            <a:schemeClr val="dk1"/>
+          </a:fillRef>
+          <a:effectRef idx="2">
+            <a:schemeClr val="dk1"/>
+          </a:effectRef>
+          <a:fontRef idx="minor">
+            <a:schemeClr val="tx1"/>
+          </a:fontRef>
+        </p:style>
+      </p:cxnSp>
+      <p:cxnSp>
+        <p:nvCxnSpPr>
+          <p:cNvPr id="12" name="Connecteur droit avec flèche 11"/>
+          <p:cNvCxnSpPr/>
+          <p:nvPr/>
+        </p:nvCxnSpPr>
+        <p:spPr>
+          <a:xfrm flipH="1">
+            <a:off x="6801633" y="3394553"/>
+            <a:ext cx="1202499" cy="2041743"/>
+          </a:xfrm>
+          <a:prstGeom prst="straightConnector1">
+            <a:avLst/>
+          </a:prstGeom>
+          <a:ln>
+            <a:tailEnd type="triangle"/>
+          </a:ln>
+        </p:spPr>
+        <p:style>
+          <a:lnRef idx="3">
+            <a:schemeClr val="dk1"/>
+          </a:lnRef>
+          <a:fillRef idx="0">
+            <a:schemeClr val="dk1"/>
+          </a:fillRef>
+          <a:effectRef idx="2">
+            <a:schemeClr val="dk1"/>
+          </a:effectRef>
+          <a:fontRef idx="minor">
+            <a:schemeClr val="tx1"/>
+          </a:fontRef>
+        </p:style>
+      </p:cxnSp>
+      <p:cxnSp>
+        <p:nvCxnSpPr>
+          <p:cNvPr id="18" name="Connecteur droit avec flèche 17"/>
+          <p:cNvCxnSpPr/>
+          <p:nvPr/>
+        </p:nvCxnSpPr>
+        <p:spPr>
+          <a:xfrm>
+            <a:off x="4196219" y="3256767"/>
+            <a:ext cx="1077239" cy="901874"/>
+          </a:xfrm>
+          <a:prstGeom prst="straightConnector1">
+            <a:avLst/>
+          </a:prstGeom>
+          <a:ln>
+            <a:tailEnd type="triangle"/>
+          </a:ln>
+        </p:spPr>
+        <p:style>
+          <a:lnRef idx="3">
+            <a:schemeClr val="dk1"/>
+          </a:lnRef>
+          <a:fillRef idx="0">
+            <a:schemeClr val="dk1"/>
+          </a:fillRef>
+          <a:effectRef idx="2">
+            <a:schemeClr val="dk1"/>
+          </a:effectRef>
+          <a:fontRef idx="minor">
+            <a:schemeClr val="tx1"/>
+          </a:fontRef>
+        </p:style>
+      </p:cxnSp>
     </p:spTree>
     <p:extLst>
       <p:ext uri="{BB962C8B-B14F-4D97-AF65-F5344CB8AC3E}">
-        <p14:creationId xmlns:p14="http://schemas.microsoft.com/office/powerpoint/2010/main" val="2217613158"/>
+        <p14:creationId xmlns:p14="http://schemas.microsoft.com/office/powerpoint/2010/main" val="3853107822"/>
       </p:ext>
     </p:extLst>
   </p:cSld>
@@ -3714,14 +4143,262 @@
   <p:timing>
     <p:tnLst>
       <p:par>
-        <p:cTn id="1" dur="indefinite" restart="never" nodeType="tmRoot"/>
+        <p:cTn id="1" dur="indefinite" restart="never" nodeType="tmRoot">
+          <p:childTnLst>
+            <p:seq concurrent="1" nextAc="seek">
+              <p:cTn id="2" dur="indefinite" nodeType="mainSeq">
+                <p:childTnLst>
+                  <p:par>
+                    <p:cTn id="3" fill="hold">
+                      <p:stCondLst>
+                        <p:cond delay="indefinite"/>
+                      </p:stCondLst>
+                      <p:childTnLst>
+                        <p:par>
+                          <p:cTn id="4" fill="hold">
+                            <p:stCondLst>
+                              <p:cond delay="0"/>
+                            </p:stCondLst>
+                            <p:childTnLst>
+                              <p:par>
+                                <p:cTn id="5" presetID="1" presetClass="entr" presetSubtype="0" fill="hold" nodeType="clickEffect">
+                                  <p:stCondLst>
+                                    <p:cond delay="0"/>
+                                  </p:stCondLst>
+                                  <p:childTnLst>
+                                    <p:set>
+                                      <p:cBhvr>
+                                        <p:cTn id="6" dur="1" fill="hold">
+                                          <p:stCondLst>
+                                            <p:cond delay="0"/>
+                                          </p:stCondLst>
+                                        </p:cTn>
+                                        <p:tgtEl>
+                                          <p:spTgt spid="6"/>
+                                        </p:tgtEl>
+                                        <p:attrNameLst>
+                                          <p:attrName>style.visibility</p:attrName>
+                                        </p:attrNameLst>
+                                      </p:cBhvr>
+                                      <p:to>
+                                        <p:strVal val="visible"/>
+                                      </p:to>
+                                    </p:set>
+                                  </p:childTnLst>
+                                </p:cTn>
+                              </p:par>
+                            </p:childTnLst>
+                          </p:cTn>
+                        </p:par>
+                      </p:childTnLst>
+                    </p:cTn>
+                  </p:par>
+                  <p:par>
+                    <p:cTn id="7" fill="hold">
+                      <p:stCondLst>
+                        <p:cond delay="indefinite"/>
+                      </p:stCondLst>
+                      <p:childTnLst>
+                        <p:par>
+                          <p:cTn id="8" fill="hold">
+                            <p:stCondLst>
+                              <p:cond delay="0"/>
+                            </p:stCondLst>
+                            <p:childTnLst>
+                              <p:par>
+                                <p:cTn id="9" presetID="1" presetClass="entr" presetSubtype="0" fill="hold" nodeType="clickEffect">
+                                  <p:stCondLst>
+                                    <p:cond delay="0"/>
+                                  </p:stCondLst>
+                                  <p:childTnLst>
+                                    <p:set>
+                                      <p:cBhvr>
+                                        <p:cTn id="10" dur="1" fill="hold">
+                                          <p:stCondLst>
+                                            <p:cond delay="0"/>
+                                          </p:stCondLst>
+                                        </p:cTn>
+                                        <p:tgtEl>
+                                          <p:spTgt spid="8"/>
+                                        </p:tgtEl>
+                                        <p:attrNameLst>
+                                          <p:attrName>style.visibility</p:attrName>
+                                        </p:attrNameLst>
+                                      </p:cBhvr>
+                                      <p:to>
+                                        <p:strVal val="visible"/>
+                                      </p:to>
+                                    </p:set>
+                                  </p:childTnLst>
+                                </p:cTn>
+                              </p:par>
+                            </p:childTnLst>
+                          </p:cTn>
+                        </p:par>
+                      </p:childTnLst>
+                    </p:cTn>
+                  </p:par>
+                  <p:par>
+                    <p:cTn id="11" fill="hold">
+                      <p:stCondLst>
+                        <p:cond delay="indefinite"/>
+                      </p:stCondLst>
+                      <p:childTnLst>
+                        <p:par>
+                          <p:cTn id="12" fill="hold">
+                            <p:stCondLst>
+                              <p:cond delay="0"/>
+                            </p:stCondLst>
+                            <p:childTnLst>
+                              <p:par>
+                                <p:cTn id="13" presetID="1" presetClass="entr" presetSubtype="0" fill="hold" nodeType="clickEffect">
+                                  <p:stCondLst>
+                                    <p:cond delay="0"/>
+                                  </p:stCondLst>
+                                  <p:childTnLst>
+                                    <p:set>
+                                      <p:cBhvr>
+                                        <p:cTn id="14" dur="1" fill="hold">
+                                          <p:stCondLst>
+                                            <p:cond delay="0"/>
+                                          </p:stCondLst>
+                                        </p:cTn>
+                                        <p:tgtEl>
+                                          <p:spTgt spid="10"/>
+                                        </p:tgtEl>
+                                        <p:attrNameLst>
+                                          <p:attrName>style.visibility</p:attrName>
+                                        </p:attrNameLst>
+                                      </p:cBhvr>
+                                      <p:to>
+                                        <p:strVal val="visible"/>
+                                      </p:to>
+                                    </p:set>
+                                  </p:childTnLst>
+                                </p:cTn>
+                              </p:par>
+                            </p:childTnLst>
+                          </p:cTn>
+                        </p:par>
+                      </p:childTnLst>
+                    </p:cTn>
+                  </p:par>
+                  <p:par>
+                    <p:cTn id="15" fill="hold">
+                      <p:stCondLst>
+                        <p:cond delay="indefinite"/>
+                      </p:stCondLst>
+                      <p:childTnLst>
+                        <p:par>
+                          <p:cTn id="16" fill="hold">
+                            <p:stCondLst>
+                              <p:cond delay="0"/>
+                            </p:stCondLst>
+                            <p:childTnLst>
+                              <p:par>
+                                <p:cTn id="17" presetID="1" presetClass="entr" presetSubtype="0" fill="hold" nodeType="clickEffect">
+                                  <p:stCondLst>
+                                    <p:cond delay="0"/>
+                                  </p:stCondLst>
+                                  <p:childTnLst>
+                                    <p:set>
+                                      <p:cBhvr>
+                                        <p:cTn id="18" dur="1" fill="hold">
+                                          <p:stCondLst>
+                                            <p:cond delay="0"/>
+                                          </p:stCondLst>
+                                        </p:cTn>
+                                        <p:tgtEl>
+                                          <p:spTgt spid="12"/>
+                                        </p:tgtEl>
+                                        <p:attrNameLst>
+                                          <p:attrName>style.visibility</p:attrName>
+                                        </p:attrNameLst>
+                                      </p:cBhvr>
+                                      <p:to>
+                                        <p:strVal val="visible"/>
+                                      </p:to>
+                                    </p:set>
+                                  </p:childTnLst>
+                                </p:cTn>
+                              </p:par>
+                            </p:childTnLst>
+                          </p:cTn>
+                        </p:par>
+                      </p:childTnLst>
+                    </p:cTn>
+                  </p:par>
+                  <p:par>
+                    <p:cTn id="19" fill="hold">
+                      <p:stCondLst>
+                        <p:cond delay="indefinite"/>
+                      </p:stCondLst>
+                      <p:childTnLst>
+                        <p:par>
+                          <p:cTn id="20" fill="hold">
+                            <p:stCondLst>
+                              <p:cond delay="0"/>
+                            </p:stCondLst>
+                            <p:childTnLst>
+                              <p:par>
+                                <p:cTn id="21" presetID="1" presetClass="entr" presetSubtype="0" fill="hold" nodeType="clickEffect">
+                                  <p:stCondLst>
+                                    <p:cond delay="0"/>
+                                  </p:stCondLst>
+                                  <p:childTnLst>
+                                    <p:set>
+                                      <p:cBhvr>
+                                        <p:cTn id="22" dur="1" fill="hold">
+                                          <p:stCondLst>
+                                            <p:cond delay="0"/>
+                                          </p:stCondLst>
+                                        </p:cTn>
+                                        <p:tgtEl>
+                                          <p:spTgt spid="18"/>
+                                        </p:tgtEl>
+                                        <p:attrNameLst>
+                                          <p:attrName>style.visibility</p:attrName>
+                                        </p:attrNameLst>
+                                      </p:cBhvr>
+                                      <p:to>
+                                        <p:strVal val="visible"/>
+                                      </p:to>
+                                    </p:set>
+                                  </p:childTnLst>
+                                </p:cTn>
+                              </p:par>
+                            </p:childTnLst>
+                          </p:cTn>
+                        </p:par>
+                      </p:childTnLst>
+                    </p:cTn>
+                  </p:par>
+                </p:childTnLst>
+              </p:cTn>
+              <p:prevCondLst>
+                <p:cond evt="onPrev" delay="0">
+                  <p:tgtEl>
+                    <p:sldTgt/>
+                  </p:tgtEl>
+                </p:cond>
+              </p:prevCondLst>
+              <p:nextCondLst>
+                <p:cond evt="onNext" delay="0">
+                  <p:tgtEl>
+                    <p:sldTgt/>
+                  </p:tgtEl>
+                </p:cond>
+              </p:nextCondLst>
+            </p:seq>
+          </p:childTnLst>
+        </p:cTn>
       </p:par>
     </p:tnLst>
   </p:timing>
 </p:sld>
 </file>
 
-<file path=ppt/slides/slide4.xml><?xml version="1.0" encoding="utf-8"?>
+<file path=ppt/slides/slide5.xml><?xml version="1.0" encoding="utf-8"?>
 <p:sld xmlns:a="http://schemas.openxmlformats.org/drawingml/2006/main" xmlns:r="http://schemas.openxmlformats.org/officeDocument/2006/relationships" xmlns:p="http://schemas.openxmlformats.org/presentationml/2006/main">
   <p:cSld>
     <p:spTree>
@@ -3880,7 +4557,7 @@
 </p:sld>
 </file>
 
-<file path=ppt/slides/slide5.xml><?xml version="1.0" encoding="utf-8"?>
+<file path=ppt/slides/slide6.xml><?xml version="1.0" encoding="utf-8"?>
 <p:sld xmlns:a="http://schemas.openxmlformats.org/drawingml/2006/main" xmlns:r="http://schemas.openxmlformats.org/officeDocument/2006/relationships" xmlns:p="http://schemas.openxmlformats.org/presentationml/2006/main">
   <p:cSld>
     <p:spTree>
@@ -4039,7 +4716,7 @@
 </p:sld>
 </file>
 
-<file path=ppt/slides/slide6.xml><?xml version="1.0" encoding="utf-8"?>
+<file path=ppt/slides/slide7.xml><?xml version="1.0" encoding="utf-8"?>
 <p:sld xmlns:a="http://schemas.openxmlformats.org/drawingml/2006/main" xmlns:r="http://schemas.openxmlformats.org/officeDocument/2006/relationships" xmlns:p="http://schemas.openxmlformats.org/presentationml/2006/main">
   <p:cSld>
     <p:spTree>

--- a/1 am/2 نظام التشغيل/cours 6/عرض الدرس.pptx
+++ b/1 am/2 نظام التشغيل/cours 6/عرض الدرس.pptx
@@ -10,7 +10,7 @@
     <p:sldId id="262" r:id="rId4"/>
     <p:sldId id="265" r:id="rId5"/>
     <p:sldId id="261" r:id="rId6"/>
-    <p:sldId id="264" r:id="rId7"/>
+    <p:sldId id="266" r:id="rId7"/>
     <p:sldId id="259" r:id="rId8"/>
   </p:sldIdLst>
   <p:sldSz cx="12192000" cy="6858000"/>
@@ -249,7 +249,7 @@
           <a:p>
             <a:fld id="{33E46DBA-FA3B-4C5F-B700-4671668DAB72}" type="datetimeFigureOut">
               <a:rPr lang="fr-FR" smtClean="0"/>
-              <a:t>14/01/2025</a:t>
+              <a:t>17/01/2025</a:t>
             </a:fld>
             <a:endParaRPr lang="fr-FR"/>
           </a:p>
@@ -419,7 +419,7 @@
           <a:p>
             <a:fld id="{33E46DBA-FA3B-4C5F-B700-4671668DAB72}" type="datetimeFigureOut">
               <a:rPr lang="fr-FR" smtClean="0"/>
-              <a:t>14/01/2025</a:t>
+              <a:t>17/01/2025</a:t>
             </a:fld>
             <a:endParaRPr lang="fr-FR"/>
           </a:p>
@@ -599,7 +599,7 @@
           <a:p>
             <a:fld id="{33E46DBA-FA3B-4C5F-B700-4671668DAB72}" type="datetimeFigureOut">
               <a:rPr lang="fr-FR" smtClean="0"/>
-              <a:t>14/01/2025</a:t>
+              <a:t>17/01/2025</a:t>
             </a:fld>
             <a:endParaRPr lang="fr-FR"/>
           </a:p>
@@ -769,7 +769,7 @@
           <a:p>
             <a:fld id="{33E46DBA-FA3B-4C5F-B700-4671668DAB72}" type="datetimeFigureOut">
               <a:rPr lang="fr-FR" smtClean="0"/>
-              <a:t>14/01/2025</a:t>
+              <a:t>17/01/2025</a:t>
             </a:fld>
             <a:endParaRPr lang="fr-FR"/>
           </a:p>
@@ -1015,7 +1015,7 @@
           <a:p>
             <a:fld id="{33E46DBA-FA3B-4C5F-B700-4671668DAB72}" type="datetimeFigureOut">
               <a:rPr lang="fr-FR" smtClean="0"/>
-              <a:t>14/01/2025</a:t>
+              <a:t>17/01/2025</a:t>
             </a:fld>
             <a:endParaRPr lang="fr-FR"/>
           </a:p>
@@ -1247,7 +1247,7 @@
           <a:p>
             <a:fld id="{33E46DBA-FA3B-4C5F-B700-4671668DAB72}" type="datetimeFigureOut">
               <a:rPr lang="fr-FR" smtClean="0"/>
-              <a:t>14/01/2025</a:t>
+              <a:t>17/01/2025</a:t>
             </a:fld>
             <a:endParaRPr lang="fr-FR"/>
           </a:p>
@@ -1614,7 +1614,7 @@
           <a:p>
             <a:fld id="{33E46DBA-FA3B-4C5F-B700-4671668DAB72}" type="datetimeFigureOut">
               <a:rPr lang="fr-FR" smtClean="0"/>
-              <a:t>14/01/2025</a:t>
+              <a:t>17/01/2025</a:t>
             </a:fld>
             <a:endParaRPr lang="fr-FR"/>
           </a:p>
@@ -1732,7 +1732,7 @@
           <a:p>
             <a:fld id="{33E46DBA-FA3B-4C5F-B700-4671668DAB72}" type="datetimeFigureOut">
               <a:rPr lang="fr-FR" smtClean="0"/>
-              <a:t>14/01/2025</a:t>
+              <a:t>17/01/2025</a:t>
             </a:fld>
             <a:endParaRPr lang="fr-FR"/>
           </a:p>
@@ -1827,7 +1827,7 @@
           <a:p>
             <a:fld id="{33E46DBA-FA3B-4C5F-B700-4671668DAB72}" type="datetimeFigureOut">
               <a:rPr lang="fr-FR" smtClean="0"/>
-              <a:t>14/01/2025</a:t>
+              <a:t>17/01/2025</a:t>
             </a:fld>
             <a:endParaRPr lang="fr-FR"/>
           </a:p>
@@ -2104,7 +2104,7 @@
           <a:p>
             <a:fld id="{33E46DBA-FA3B-4C5F-B700-4671668DAB72}" type="datetimeFigureOut">
               <a:rPr lang="fr-FR" smtClean="0"/>
-              <a:t>14/01/2025</a:t>
+              <a:t>17/01/2025</a:t>
             </a:fld>
             <a:endParaRPr lang="fr-FR"/>
           </a:p>
@@ -2357,7 +2357,7 @@
           <a:p>
             <a:fld id="{33E46DBA-FA3B-4C5F-B700-4671668DAB72}" type="datetimeFigureOut">
               <a:rPr lang="fr-FR" smtClean="0"/>
-              <a:t>14/01/2025</a:t>
+              <a:t>17/01/2025</a:t>
             </a:fld>
             <a:endParaRPr lang="fr-FR"/>
           </a:p>
@@ -2570,7 +2570,7 @@
           <a:p>
             <a:fld id="{33E46DBA-FA3B-4C5F-B700-4671668DAB72}" type="datetimeFigureOut">
               <a:rPr lang="fr-FR" smtClean="0"/>
-              <a:t>14/01/2025</a:t>
+              <a:t>17/01/2025</a:t>
             </a:fld>
             <a:endParaRPr lang="fr-FR"/>
           </a:p>
@@ -3111,6 +3111,9 @@
             </a:pPr>
             <a:r>
               <a:rPr lang="ar-DZ" sz="3600" dirty="0">
+                <a:solidFill>
+                  <a:srgbClr val="FF0000"/>
+                </a:solidFill>
                 <a:latin typeface="Times New Roman" panose="02020603050405020304" pitchFamily="18" charset="0"/>
                 <a:cs typeface="Times New Roman" panose="02020603050405020304" pitchFamily="18" charset="0"/>
               </a:rPr>
@@ -3118,16 +3121,26 @@
             </a:r>
             <a:r>
               <a:rPr lang="ar-DZ" sz="3600" dirty="0" smtClean="0">
+                <a:solidFill>
+                  <a:srgbClr val="FF0000"/>
+                </a:solidFill>
                 <a:latin typeface="Times New Roman" panose="02020603050405020304" pitchFamily="18" charset="0"/>
                 <a:cs typeface="Times New Roman" panose="02020603050405020304" pitchFamily="18" charset="0"/>
               </a:rPr>
               <a:t>المكتب</a:t>
             </a:r>
             <a:r>
-              <a:rPr lang="en-US" sz="1600" dirty="0" smtClean="0"/>
+              <a:rPr lang="en-US" sz="1600" dirty="0" smtClean="0">
+                <a:solidFill>
+                  <a:srgbClr val="FF0000"/>
+                </a:solidFill>
+              </a:rPr>
               <a:t> </a:t>
             </a:r>
             <a:endParaRPr lang="en-US" sz="2800" dirty="0">
+              <a:solidFill>
+                <a:srgbClr val="FF0000"/>
+              </a:solidFill>
               <a:latin typeface="Calibri" panose="020F0502020204030204" pitchFamily="34" charset="0"/>
               <a:ea typeface="Calibri" panose="020F0502020204030204" pitchFamily="34" charset="0"/>
               <a:cs typeface="Arial" panose="020B0604020202020204" pitchFamily="34" charset="0"/>
@@ -3169,12 +3182,18 @@
             </a:pPr>
             <a:r>
               <a:rPr lang="ar-DZ" sz="3600" dirty="0" smtClean="0">
+                <a:solidFill>
+                  <a:srgbClr val="FF0000"/>
+                </a:solidFill>
                 <a:latin typeface="Times New Roman" panose="02020603050405020304" pitchFamily="18" charset="0"/>
                 <a:cs typeface="Times New Roman" panose="02020603050405020304" pitchFamily="18" charset="0"/>
               </a:rPr>
               <a:t>الأيقونات</a:t>
             </a:r>
             <a:endParaRPr lang="ar-DZ" sz="3600" dirty="0">
+              <a:solidFill>
+                <a:srgbClr val="FF0000"/>
+              </a:solidFill>
               <a:latin typeface="Times New Roman" panose="02020603050405020304" pitchFamily="18" charset="0"/>
               <a:cs typeface="Times New Roman" panose="02020603050405020304" pitchFamily="18" charset="0"/>
             </a:endParaRPr>
@@ -3209,6 +3228,9 @@
             </a:pPr>
             <a:r>
               <a:rPr lang="ar-DZ" sz="3600" dirty="0">
+                <a:solidFill>
+                  <a:srgbClr val="FF0000"/>
+                </a:solidFill>
                 <a:latin typeface="Times New Roman" panose="02020603050405020304" pitchFamily="18" charset="0"/>
                 <a:cs typeface="Times New Roman" panose="02020603050405020304" pitchFamily="18" charset="0"/>
               </a:rPr>
@@ -3216,12 +3238,19 @@
             </a:r>
             <a:r>
               <a:rPr lang="ar-DZ" sz="3600" dirty="0" smtClean="0">
+                <a:solidFill>
+                  <a:srgbClr val="FF0000"/>
+                </a:solidFill>
                 <a:latin typeface="Times New Roman" panose="02020603050405020304" pitchFamily="18" charset="0"/>
                 <a:cs typeface="Times New Roman" panose="02020603050405020304" pitchFamily="18" charset="0"/>
               </a:rPr>
               <a:t>المهام</a:t>
             </a:r>
-            <a:endParaRPr lang="ar-DZ" dirty="0"/>
+            <a:endParaRPr lang="ar-DZ" dirty="0">
+              <a:solidFill>
+                <a:srgbClr val="FF0000"/>
+              </a:solidFill>
+            </a:endParaRPr>
           </a:p>
         </p:txBody>
       </p:sp>
@@ -3521,7 +3550,7 @@
         <p:spPr>
           <a:xfrm>
             <a:off x="400831" y="2057633"/>
-            <a:ext cx="11285952" cy="1200329"/>
+            <a:ext cx="11285952" cy="2308324"/>
           </a:xfrm>
           <a:prstGeom prst="rect">
             <a:avLst/>
@@ -3548,7 +3577,32 @@
             </a:r>
             <a:r>
               <a:rPr lang="ar-DZ" sz="3600" dirty="0"/>
-              <a:t> التي تظهر على الشاشة. و لكن يا ترى هل هناك عناصر أخرى مخفية ؟</a:t>
+              <a:t> التي تظهر على </a:t>
+            </a:r>
+            <a:r>
+              <a:rPr lang="ar-DZ" sz="3600" dirty="0" smtClean="0"/>
+              <a:t>الشاشة.</a:t>
+            </a:r>
+          </a:p>
+          <a:p>
+            <a:pPr marL="642938" indent="-642938" algn="r" rtl="1">
+              <a:buFont typeface="Wingdings" panose="05000000000000000000" pitchFamily="2" charset="2"/>
+              <a:buChar char="Ø"/>
+            </a:pPr>
+            <a:endParaRPr lang="ar-DZ" sz="3600" dirty="0" smtClean="0"/>
+          </a:p>
+          <a:p>
+            <a:pPr marL="642938" indent="-642938" algn="r" rtl="1">
+              <a:buFont typeface="Wingdings" panose="05000000000000000000" pitchFamily="2" charset="2"/>
+              <a:buChar char="Ø"/>
+            </a:pPr>
+            <a:r>
+              <a:rPr lang="ar-DZ" sz="3600" dirty="0" smtClean="0"/>
+              <a:t>يا </a:t>
+            </a:r>
+            <a:r>
+              <a:rPr lang="ar-DZ" sz="3600" dirty="0"/>
+              <a:t>ترى هل هناك عناصر أخرى مخفية ؟</a:t>
             </a:r>
             <a:endParaRPr lang="ar-DZ" sz="3300" dirty="0"/>
           </a:p>
@@ -3602,7 +3656,7 @@
         </p:nvSpPr>
         <p:spPr>
           <a:xfrm>
-            <a:off x="375781" y="78747"/>
+            <a:off x="375781" y="191481"/>
             <a:ext cx="11511419" cy="622799"/>
           </a:xfrm>
           <a:prstGeom prst="rect">
@@ -3633,7 +3687,19 @@
                 <a:ea typeface="Times New Roman" panose="02020603050405020304" pitchFamily="18" charset="0"/>
                 <a:cs typeface="Times New Roman" panose="02020603050405020304" pitchFamily="18" charset="0"/>
               </a:rPr>
-              <a:t>نشاط :</a:t>
+              <a:t>نشاط 01 </a:t>
+            </a:r>
+            <a:r>
+              <a:rPr lang="ar-DZ" sz="3200" b="1" u="sng" dirty="0" smtClean="0">
+                <a:solidFill>
+                  <a:srgbClr val="FF0000"/>
+                </a:solidFill>
+                <a:effectLst/>
+                <a:latin typeface="Calibri" panose="020F0502020204030204" pitchFamily="34" charset="0"/>
+                <a:ea typeface="Times New Roman" panose="02020603050405020304" pitchFamily="18" charset="0"/>
+                <a:cs typeface="Times New Roman" panose="02020603050405020304" pitchFamily="18" charset="0"/>
+              </a:rPr>
+              <a:t>:</a:t>
             </a:r>
             <a:endParaRPr lang="fr-FR" sz="3200" dirty="0"/>
           </a:p>
@@ -3648,7 +3714,7 @@
         <p:spPr>
           <a:xfrm>
             <a:off x="538619" y="1327760"/>
-            <a:ext cx="11348581" cy="4031873"/>
+            <a:ext cx="11348581" cy="4524315"/>
           </a:xfrm>
           <a:prstGeom prst="rect">
             <a:avLst/>
@@ -3682,16 +3748,16 @@
               <a:t>Ce </a:t>
             </a:r>
             <a:r>
-              <a:rPr lang="fr-FR" sz="3200" dirty="0"/>
-              <a:t>PC </a:t>
-            </a:r>
-            <a:r>
               <a:rPr lang="fr-FR" sz="3200" dirty="0" smtClean="0"/>
-              <a:t>، </a:t>
+              <a:t>PC</a:t>
             </a:r>
             <a:r>
               <a:rPr lang="ar-DZ" sz="3200" dirty="0" smtClean="0"/>
-              <a:t>و تمعن فيها جيّدا.</a:t>
+              <a:t> و </a:t>
+            </a:r>
+            <a:r>
+              <a:rPr lang="ar-DZ" sz="3200" dirty="0" smtClean="0"/>
+              <a:t>تمعن فيها جيّدا.</a:t>
             </a:r>
           </a:p>
           <a:p>
@@ -3754,24 +3820,12 @@
             </a:r>
             <a:r>
               <a:rPr lang="ar-DZ" sz="3200" dirty="0"/>
-              <a:t>إظهار النافذة عبر شريط المهام، ا</a:t>
+              <a:t>إظهار النافذة عبر شريط </a:t>
             </a:r>
             <a:r>
               <a:rPr lang="ar-DZ" sz="3200" dirty="0" smtClean="0"/>
-              <a:t>ضغط </a:t>
-            </a:r>
-            <a:r>
-              <a:rPr lang="ar-DZ" sz="3200" dirty="0"/>
-              <a:t>على زر </a:t>
-            </a:r>
-            <a:r>
-              <a:rPr lang="ar-DZ" sz="3200" dirty="0" smtClean="0"/>
-              <a:t>الغلق.</a:t>
-            </a:r>
-          </a:p>
-          <a:p>
-            <a:pPr algn="r" rtl="1"/>
-            <a:endParaRPr lang="ar-DZ" sz="3200" dirty="0" smtClean="0"/>
+              <a:t>المهام.</a:t>
+            </a:r>
           </a:p>
           <a:p>
             <a:pPr marL="457200" indent="-457200" algn="r" rtl="1">
@@ -3780,6 +3834,36 @@
             </a:pPr>
             <a:r>
               <a:rPr lang="ar-DZ" sz="3200" dirty="0" smtClean="0"/>
+              <a:t> </a:t>
+            </a:r>
+            <a:r>
+              <a:rPr lang="ar-DZ" sz="3200" dirty="0"/>
+              <a:t>ا</a:t>
+            </a:r>
+            <a:r>
+              <a:rPr lang="ar-DZ" sz="3200" dirty="0" smtClean="0"/>
+              <a:t>ضغط </a:t>
+            </a:r>
+            <a:r>
+              <a:rPr lang="ar-DZ" sz="3200" dirty="0"/>
+              <a:t>على زر </a:t>
+            </a:r>
+            <a:r>
+              <a:rPr lang="ar-DZ" sz="3200" dirty="0" smtClean="0"/>
+              <a:t>الغلق.</a:t>
+            </a:r>
+          </a:p>
+          <a:p>
+            <a:pPr algn="r" rtl="1"/>
+            <a:endParaRPr lang="ar-DZ" sz="3200" dirty="0" smtClean="0"/>
+          </a:p>
+          <a:p>
+            <a:pPr marL="457200" indent="-457200" algn="r" rtl="1">
+              <a:buFont typeface="Wingdings" panose="05000000000000000000" pitchFamily="2" charset="2"/>
+              <a:buChar char="Ø"/>
+            </a:pPr>
+            <a:r>
+              <a:rPr lang="ar-DZ" sz="3200" dirty="0" smtClean="0"/>
               <a:t> قم بفتح برنامج </a:t>
             </a:r>
             <a:r>
@@ -3792,7 +3876,15 @@
             </a:r>
             <a:r>
               <a:rPr lang="ar-DZ" sz="3200" dirty="0" smtClean="0"/>
-              <a:t> و إنشاء رسم بسيط لأحد مكونات الحاسوب.</a:t>
+              <a:t> و </a:t>
+            </a:r>
+            <a:r>
+              <a:rPr lang="ar-DZ" sz="3200" dirty="0" smtClean="0"/>
+              <a:t>إنشا </a:t>
+            </a:r>
+            <a:r>
+              <a:rPr lang="ar-DZ" sz="3200" dirty="0" smtClean="0"/>
+              <a:t>رسم بسيط لأحد مكونات الحاسوب.</a:t>
             </a:r>
           </a:p>
           <a:p>
@@ -3896,7 +3988,19 @@
                 <a:ea typeface="Times New Roman" panose="02020603050405020304" pitchFamily="18" charset="0"/>
                 <a:cs typeface="Times New Roman" panose="02020603050405020304" pitchFamily="18" charset="0"/>
               </a:rPr>
-              <a:t>نشاط :</a:t>
+              <a:t>نشاط 02 </a:t>
+            </a:r>
+            <a:r>
+              <a:rPr lang="ar-DZ" sz="3200" b="1" u="sng" dirty="0" smtClean="0">
+                <a:solidFill>
+                  <a:srgbClr val="FF0000"/>
+                </a:solidFill>
+                <a:effectLst/>
+                <a:latin typeface="Calibri" panose="020F0502020204030204" pitchFamily="34" charset="0"/>
+                <a:ea typeface="Times New Roman" panose="02020603050405020304" pitchFamily="18" charset="0"/>
+                <a:cs typeface="Times New Roman" panose="02020603050405020304" pitchFamily="18" charset="0"/>
+              </a:rPr>
+              <a:t>:</a:t>
             </a:r>
             <a:endParaRPr lang="fr-FR" sz="3200" dirty="0"/>
           </a:p>
@@ -3917,8 +4021,8 @@
         </p:blipFill>
         <p:spPr bwMode="auto">
           <a:xfrm>
-            <a:off x="1315233" y="78747"/>
-            <a:ext cx="8317282" cy="3691587"/>
+            <a:off x="1172628" y="78747"/>
+            <a:ext cx="8602490" cy="3691587"/>
           </a:xfrm>
           <a:prstGeom prst="rect">
             <a:avLst/>
@@ -3947,8 +4051,8 @@
         </p:blipFill>
         <p:spPr bwMode="auto">
           <a:xfrm>
-            <a:off x="2803451" y="3970750"/>
-            <a:ext cx="5526357" cy="2680397"/>
+            <a:off x="2493513" y="3970750"/>
+            <a:ext cx="5960721" cy="2680397"/>
           </a:xfrm>
           <a:prstGeom prst="rect">
             <a:avLst/>
@@ -3977,8 +4081,19 @@
             <a:avLst/>
           </a:prstGeom>
           <a:ln>
+            <a:solidFill>
+              <a:srgbClr val="FF0000"/>
+            </a:solidFill>
             <a:tailEnd type="triangle"/>
           </a:ln>
+          <a:effectLst>
+            <a:glow rad="63500">
+              <a:schemeClr val="accent4">
+                <a:satMod val="175000"/>
+                <a:alpha val="40000"/>
+              </a:schemeClr>
+            </a:glow>
+          </a:effectLst>
         </p:spPr>
         <p:style>
           <a:lnRef idx="3">
@@ -4010,8 +4125,19 @@
             <a:avLst/>
           </a:prstGeom>
           <a:ln>
+            <a:solidFill>
+              <a:srgbClr val="FF0000"/>
+            </a:solidFill>
             <a:tailEnd type="triangle"/>
           </a:ln>
+          <a:effectLst>
+            <a:glow rad="63500">
+              <a:schemeClr val="accent4">
+                <a:satMod val="175000"/>
+                <a:alpha val="40000"/>
+              </a:schemeClr>
+            </a:glow>
+          </a:effectLst>
         </p:spPr>
         <p:style>
           <a:lnRef idx="3">
@@ -4043,8 +4169,19 @@
             <a:avLst/>
           </a:prstGeom>
           <a:ln>
+            <a:solidFill>
+              <a:srgbClr val="FF0000"/>
+            </a:solidFill>
             <a:tailEnd type="triangle"/>
           </a:ln>
+          <a:effectLst>
+            <a:glow rad="63500">
+              <a:schemeClr val="accent4">
+                <a:satMod val="175000"/>
+                <a:alpha val="40000"/>
+              </a:schemeClr>
+            </a:glow>
+          </a:effectLst>
         </p:spPr>
         <p:style>
           <a:lnRef idx="3">
@@ -4076,8 +4213,19 @@
             <a:avLst/>
           </a:prstGeom>
           <a:ln>
+            <a:solidFill>
+              <a:srgbClr val="FF0000"/>
+            </a:solidFill>
             <a:tailEnd type="triangle"/>
           </a:ln>
+          <a:effectLst>
+            <a:glow rad="63500">
+              <a:schemeClr val="accent4">
+                <a:satMod val="175000"/>
+                <a:alpha val="40000"/>
+              </a:schemeClr>
+            </a:glow>
+          </a:effectLst>
         </p:spPr>
         <p:style>
           <a:lnRef idx="3">
@@ -4109,8 +4257,19 @@
             <a:avLst/>
           </a:prstGeom>
           <a:ln>
+            <a:solidFill>
+              <a:srgbClr val="FF0000"/>
+            </a:solidFill>
             <a:tailEnd type="triangle"/>
           </a:ln>
+          <a:effectLst>
+            <a:glow rad="63500">
+              <a:schemeClr val="accent4">
+                <a:satMod val="175000"/>
+                <a:alpha val="40000"/>
+              </a:schemeClr>
+            </a:glow>
+          </a:effectLst>
         </p:spPr>
         <p:style>
           <a:lnRef idx="3">
@@ -4401,6 +4560,28 @@
 <file path=ppt/slides/slide5.xml><?xml version="1.0" encoding="utf-8"?>
 <p:sld xmlns:a="http://schemas.openxmlformats.org/drawingml/2006/main" xmlns:r="http://schemas.openxmlformats.org/officeDocument/2006/relationships" xmlns:p="http://schemas.openxmlformats.org/presentationml/2006/main">
   <p:cSld>
+    <p:bg>
+      <p:bgPr>
+        <a:gradFill>
+          <a:gsLst>
+            <a:gs pos="0">
+              <a:schemeClr val="accent1">
+                <a:lumMod val="5000"/>
+                <a:lumOff val="95000"/>
+              </a:schemeClr>
+            </a:gs>
+            <a:gs pos="100000">
+              <a:schemeClr val="accent1">
+                <a:lumMod val="40000"/>
+                <a:lumOff val="60000"/>
+              </a:schemeClr>
+            </a:gs>
+          </a:gsLst>
+          <a:lin ang="5400000" scaled="1"/>
+        </a:gradFill>
+        <a:effectLst/>
+      </p:bgPr>
+    </p:bg>
     <p:spTree>
       <p:nvGrpSpPr>
         <p:cNvPr id="1" name=""/>
@@ -4504,16 +4685,124 @@
           </a:p>
         </p:txBody>
       </p:sp>
+      <p:sp>
+        <p:nvSpPr>
+          <p:cNvPr id="2" name="ZoneTexte 1"/>
+          <p:cNvSpPr txBox="1"/>
+          <p:nvPr/>
+        </p:nvSpPr>
+        <p:spPr>
+          <a:xfrm>
+            <a:off x="365760" y="946685"/>
+            <a:ext cx="11425711" cy="2862322"/>
+          </a:xfrm>
+          <a:prstGeom prst="rect">
+            <a:avLst/>
+          </a:prstGeom>
+          <a:noFill/>
+        </p:spPr>
+        <p:txBody>
+          <a:bodyPr wrap="square" rtlCol="1">
+            <a:spAutoFit/>
+          </a:bodyPr>
+          <a:lstStyle/>
+          <a:p>
+            <a:pPr algn="r" rtl="1"/>
+            <a:r>
+              <a:rPr lang="ar-DZ" sz="3600" b="1" dirty="0" smtClean="0"/>
+              <a:t>إطار </a:t>
+            </a:r>
+            <a:r>
+              <a:rPr lang="ar-DZ" sz="3600" b="1" dirty="0"/>
+              <a:t>يظهر عند فتح مجلد أو برنامج، يوجد أعلى يمين هذا الإطار 03 أزرار و </a:t>
+            </a:r>
+            <a:r>
+              <a:rPr lang="ar-DZ" sz="3600" b="1" dirty="0" smtClean="0"/>
+              <a:t>هي :</a:t>
+            </a:r>
+          </a:p>
+          <a:p>
+            <a:pPr marL="457200" indent="-457200" algn="r" rtl="1">
+              <a:buFont typeface="Arial" panose="020B0604020202020204" pitchFamily="34" charset="0"/>
+              <a:buChar char="•"/>
+            </a:pPr>
+            <a:r>
+              <a:rPr lang="ar-DZ" sz="3600" b="1" dirty="0" smtClean="0"/>
+              <a:t>زر الإغلاق</a:t>
+            </a:r>
+          </a:p>
+          <a:p>
+            <a:pPr marL="457200" indent="-457200" algn="r" rtl="1">
+              <a:buFont typeface="Arial" panose="020B0604020202020204" pitchFamily="34" charset="0"/>
+              <a:buChar char="•"/>
+            </a:pPr>
+            <a:r>
+              <a:rPr lang="ar-DZ" sz="3600" b="1" dirty="0" smtClean="0"/>
+              <a:t>زر </a:t>
+            </a:r>
+            <a:r>
+              <a:rPr lang="ar-DZ" sz="3600" b="1" dirty="0"/>
+              <a:t>التصغير أو </a:t>
+            </a:r>
+            <a:r>
+              <a:rPr lang="ar-DZ" sz="3600" b="1" dirty="0" smtClean="0"/>
+              <a:t>التكبير</a:t>
+            </a:r>
+          </a:p>
+          <a:p>
+            <a:pPr marL="457200" indent="-457200" algn="r" rtl="1">
+              <a:buFont typeface="Arial" panose="020B0604020202020204" pitchFamily="34" charset="0"/>
+              <a:buChar char="•"/>
+            </a:pPr>
+            <a:r>
+              <a:rPr lang="ar-DZ" sz="3600" b="1" dirty="0" smtClean="0"/>
+              <a:t>زر </a:t>
+            </a:r>
+            <a:r>
+              <a:rPr lang="ar-DZ" sz="3600" b="1" dirty="0"/>
+              <a:t>التقليص</a:t>
+            </a:r>
+          </a:p>
+        </p:txBody>
+      </p:sp>
       <p:pic>
         <p:nvPicPr>
-          <p:cNvPr id="4" name="Image 3"/>
-          <p:cNvPicPr>
-            <a:picLocks noChangeAspect="1"/>
-          </p:cNvPicPr>
+          <p:cNvPr id="5" name="Image 4"/>
+          <p:cNvPicPr/>
           <p:nvPr/>
         </p:nvPicPr>
         <p:blipFill>
-          <a:blip r:embed="rId2">
+          <a:blip r:embed="rId2"/>
+          <a:srcRect/>
+          <a:stretch>
+            <a:fillRect/>
+          </a:stretch>
+        </p:blipFill>
+        <p:spPr bwMode="auto">
+          <a:xfrm>
+            <a:off x="8751067" y="2196219"/>
+            <a:ext cx="551146" cy="363254"/>
+          </a:xfrm>
+          <a:prstGeom prst="rect">
+            <a:avLst/>
+          </a:prstGeom>
+          <a:noFill/>
+          <a:ln w="9525">
+            <a:noFill/>
+            <a:miter lim="800000"/>
+            <a:headEnd/>
+            <a:tailEnd/>
+          </a:ln>
+        </p:spPr>
+      </p:pic>
+      <p:pic>
+        <p:nvPicPr>
+          <p:cNvPr id="7" name="Image 6"/>
+          <p:cNvPicPr/>
+          <p:nvPr/>
+        </p:nvPicPr>
+        <p:blipFill>
+          <a:blip r:embed="rId3">
             <a:extLst>
               <a:ext uri="{28A0092B-C50C-407E-A947-70E740481C1C}">
                 <a14:useLocalDpi xmlns:a14="http://schemas.microsoft.com/office/drawing/2010/main" val="0"/>
@@ -4526,14 +4815,138 @@
         </p:blipFill>
         <p:spPr>
           <a:xfrm>
-            <a:off x="1524001" y="218053"/>
-            <a:ext cx="10439400" cy="5917626"/>
+            <a:off x="7480537" y="2832083"/>
+            <a:ext cx="470792" cy="339639"/>
           </a:xfrm>
           <a:prstGeom prst="rect">
             <a:avLst/>
           </a:prstGeom>
         </p:spPr>
       </p:pic>
+      <p:pic>
+        <p:nvPicPr>
+          <p:cNvPr id="8" name="Image 7"/>
+          <p:cNvPicPr/>
+          <p:nvPr/>
+        </p:nvPicPr>
+        <p:blipFill rotWithShape="1">
+          <a:blip r:embed="rId4"/>
+          <a:srcRect l="20083" r="-1"/>
+          <a:stretch/>
+        </p:blipFill>
+        <p:spPr bwMode="auto">
+          <a:xfrm>
+            <a:off x="8785523" y="3334043"/>
+            <a:ext cx="529216" cy="365353"/>
+          </a:xfrm>
+          <a:prstGeom prst="rect">
+            <a:avLst/>
+          </a:prstGeom>
+          <a:noFill/>
+          <a:ln w="9525">
+            <a:noFill/>
+            <a:miter lim="800000"/>
+            <a:headEnd/>
+            <a:tailEnd/>
+          </a:ln>
+        </p:spPr>
+      </p:pic>
+      <p:pic>
+        <p:nvPicPr>
+          <p:cNvPr id="3" name="Image 2"/>
+          <p:cNvPicPr>
+            <a:picLocks noChangeAspect="1"/>
+          </p:cNvPicPr>
+          <p:nvPr/>
+        </p:nvPicPr>
+        <p:blipFill>
+          <a:blip r:embed="rId5">
+            <a:extLst>
+              <a:ext uri="{28A0092B-C50C-407E-A947-70E740481C1C}">
+                <a14:useLocalDpi xmlns:a14="http://schemas.microsoft.com/office/drawing/2010/main" val="0"/>
+              </a:ext>
+            </a:extLst>
+          </a:blip>
+          <a:stretch>
+            <a:fillRect/>
+          </a:stretch>
+        </p:blipFill>
+        <p:spPr>
+          <a:xfrm>
+            <a:off x="3371707" y="4067814"/>
+            <a:ext cx="5413816" cy="2493319"/>
+          </a:xfrm>
+          <a:prstGeom prst="rect">
+            <a:avLst/>
+          </a:prstGeom>
+        </p:spPr>
+      </p:pic>
+      <p:sp>
+        <p:nvSpPr>
+          <p:cNvPr id="9" name="ZoneTexte 8"/>
+          <p:cNvSpPr txBox="1"/>
+          <p:nvPr/>
+        </p:nvSpPr>
+        <p:spPr>
+          <a:xfrm>
+            <a:off x="7092862" y="133880"/>
+            <a:ext cx="4698609" cy="707886"/>
+          </a:xfrm>
+          <a:prstGeom prst="rect">
+            <a:avLst/>
+          </a:prstGeom>
+          <a:noFill/>
+        </p:spPr>
+        <p:txBody>
+          <a:bodyPr wrap="square" rtlCol="1">
+            <a:spAutoFit/>
+          </a:bodyPr>
+          <a:lstStyle/>
+          <a:p>
+            <a:pPr algn="r" rtl="1"/>
+            <a:r>
+              <a:rPr lang="ar-DZ" sz="3600" b="1" u="sng" dirty="0">
+                <a:solidFill>
+                  <a:srgbClr val="00B050"/>
+                </a:solidFill>
+              </a:rPr>
+              <a:t>4 - </a:t>
+            </a:r>
+            <a:r>
+              <a:rPr lang="ar-DZ" sz="4000" b="1" u="sng" dirty="0">
+                <a:solidFill>
+                  <a:srgbClr val="00B050"/>
+                </a:solidFill>
+              </a:rPr>
+              <a:t>النافذة</a:t>
+            </a:r>
+            <a:r>
+              <a:rPr lang="fr-FR" sz="3600" b="1" u="sng" dirty="0" err="1">
+                <a:solidFill>
+                  <a:srgbClr val="00B050"/>
+                </a:solidFill>
+              </a:rPr>
+              <a:t>Fentêtre</a:t>
+            </a:r>
+            <a:r>
+              <a:rPr lang="fr-FR" sz="3600" b="1" u="sng" dirty="0">
+                <a:solidFill>
+                  <a:srgbClr val="00B050"/>
+                </a:solidFill>
+              </a:rPr>
+              <a:t> </a:t>
+            </a:r>
+            <a:r>
+              <a:rPr lang="ar-DZ" sz="3600" b="1" u="sng" dirty="0">
+                <a:solidFill>
+                  <a:srgbClr val="00B050"/>
+                </a:solidFill>
+              </a:rPr>
+              <a:t> : </a:t>
+            </a:r>
+          </a:p>
+        </p:txBody>
+      </p:sp>
     </p:spTree>
     <p:extLst>
       <p:ext uri="{BB962C8B-B14F-4D97-AF65-F5344CB8AC3E}">
@@ -4560,6 +4973,28 @@
 <file path=ppt/slides/slide6.xml><?xml version="1.0" encoding="utf-8"?>
 <p:sld xmlns:a="http://schemas.openxmlformats.org/drawingml/2006/main" xmlns:r="http://schemas.openxmlformats.org/officeDocument/2006/relationships" xmlns:p="http://schemas.openxmlformats.org/presentationml/2006/main">
   <p:cSld>
+    <p:bg>
+      <p:bgPr>
+        <a:gradFill>
+          <a:gsLst>
+            <a:gs pos="0">
+              <a:schemeClr val="accent1">
+                <a:lumMod val="5000"/>
+                <a:lumOff val="95000"/>
+              </a:schemeClr>
+            </a:gs>
+            <a:gs pos="100000">
+              <a:schemeClr val="accent1">
+                <a:lumMod val="40000"/>
+                <a:lumOff val="60000"/>
+              </a:schemeClr>
+            </a:gs>
+          </a:gsLst>
+          <a:lin ang="5400000" scaled="1"/>
+        </a:gradFill>
+        <a:effectLst/>
+      </p:bgPr>
+    </p:bg>
     <p:spTree>
       <p:nvGrpSpPr>
         <p:cNvPr id="1" name=""/>
@@ -4663,9 +5098,124 @@
           </a:p>
         </p:txBody>
       </p:sp>
+      <p:sp>
+        <p:nvSpPr>
+          <p:cNvPr id="2" name="ZoneTexte 1"/>
+          <p:cNvSpPr txBox="1"/>
+          <p:nvPr/>
+        </p:nvSpPr>
+        <p:spPr>
+          <a:xfrm>
+            <a:off x="365760" y="1074337"/>
+            <a:ext cx="11425711" cy="1200329"/>
+          </a:xfrm>
+          <a:prstGeom prst="rect">
+            <a:avLst/>
+          </a:prstGeom>
+          <a:noFill/>
+        </p:spPr>
+        <p:txBody>
+          <a:bodyPr wrap="square" rtlCol="1">
+            <a:spAutoFit/>
+          </a:bodyPr>
+          <a:lstStyle/>
+          <a:p>
+            <a:pPr algn="r" rtl="1"/>
+            <a:r>
+              <a:rPr lang="ar-DZ" sz="3600" b="1" dirty="0">
+                <a:cs typeface="+mj-cs"/>
+              </a:rPr>
+              <a:t>إطار يحتوي على أزرار تسمح بالتحاور مع نظام التشغيل مثل: </a:t>
+            </a:r>
+            <a:r>
+              <a:rPr lang="fr-FR" sz="3600" b="1" dirty="0">
+                <a:cs typeface="+mj-cs"/>
+              </a:rPr>
+              <a:t>oui، non</a:t>
+            </a:r>
+            <a:r>
+              <a:rPr lang="fr-FR" sz="3600" b="1" dirty="0" smtClean="0">
+                <a:cs typeface="+mj-cs"/>
+              </a:rPr>
+              <a:t>،  … Annuler</a:t>
+            </a:r>
+            <a:endParaRPr lang="ar-DZ" sz="3600" b="1" dirty="0">
+              <a:cs typeface="+mj-cs"/>
+            </a:endParaRPr>
+          </a:p>
+        </p:txBody>
+      </p:sp>
+      <p:sp>
+        <p:nvSpPr>
+          <p:cNvPr id="9" name="ZoneTexte 8"/>
+          <p:cNvSpPr txBox="1"/>
+          <p:nvPr/>
+        </p:nvSpPr>
+        <p:spPr>
+          <a:xfrm>
+            <a:off x="2025748" y="226213"/>
+            <a:ext cx="9765723" cy="646331"/>
+          </a:xfrm>
+          <a:prstGeom prst="rect">
+            <a:avLst/>
+          </a:prstGeom>
+          <a:noFill/>
+        </p:spPr>
+        <p:txBody>
+          <a:bodyPr wrap="square" rtlCol="1">
+            <a:spAutoFit/>
+          </a:bodyPr>
+          <a:lstStyle/>
+          <a:p>
+            <a:pPr algn="r" rtl="1"/>
+            <a:r>
+              <a:rPr lang="ar-DZ" sz="3600" b="1" u="sng" dirty="0" smtClean="0">
+                <a:solidFill>
+                  <a:srgbClr val="00B050"/>
+                </a:solidFill>
+                <a:cs typeface="+mj-cs"/>
+              </a:rPr>
+              <a:t>5 - علبة الحوار </a:t>
+            </a:r>
+            <a:r>
+              <a:rPr lang="fr-FR" sz="3600" b="1" u="sng" dirty="0" smtClean="0">
+                <a:solidFill>
+                  <a:srgbClr val="00B050"/>
+                </a:solidFill>
+                <a:cs typeface="+mj-cs"/>
+              </a:rPr>
+              <a:t>: Boite </a:t>
+            </a:r>
+            <a:r>
+              <a:rPr lang="fr-FR" sz="3600" b="1" u="sng" dirty="0">
+                <a:solidFill>
+                  <a:srgbClr val="00B050"/>
+                </a:solidFill>
+                <a:cs typeface="+mj-cs"/>
+              </a:rPr>
+              <a:t>de </a:t>
+            </a:r>
+            <a:r>
+              <a:rPr lang="fr-FR" sz="3600" b="1" u="sng" dirty="0" smtClean="0">
+                <a:solidFill>
+                  <a:srgbClr val="00B050"/>
+                </a:solidFill>
+                <a:cs typeface="+mj-cs"/>
+              </a:rPr>
+              <a:t>dialogue</a:t>
+            </a:r>
+            <a:endParaRPr lang="ar-DZ" sz="3600" b="1" u="sng" dirty="0">
+              <a:solidFill>
+                <a:srgbClr val="00B050"/>
+              </a:solidFill>
+              <a:cs typeface="+mj-cs"/>
+            </a:endParaRPr>
+          </a:p>
+        </p:txBody>
+      </p:sp>
       <p:pic>
         <p:nvPicPr>
-          <p:cNvPr id="2" name="Image 1"/>
+          <p:cNvPr id="4" name="Image 3"/>
           <p:cNvPicPr>
             <a:picLocks noChangeAspect="1"/>
           </p:cNvPicPr>
@@ -4685,8 +5235,8 @@
         </p:blipFill>
         <p:spPr>
           <a:xfrm>
-            <a:off x="619237" y="371410"/>
-            <a:ext cx="11227495" cy="3495740"/>
+            <a:off x="3331938" y="3235569"/>
+            <a:ext cx="6094104" cy="2602522"/>
           </a:xfrm>
           <a:prstGeom prst="rect">
             <a:avLst/>
@@ -4696,7 +5246,7 @@
     </p:spTree>
     <p:extLst>
       <p:ext uri="{BB962C8B-B14F-4D97-AF65-F5344CB8AC3E}">
-        <p14:creationId xmlns:p14="http://schemas.microsoft.com/office/powerpoint/2010/main" val="2426352640"/>
+        <p14:creationId xmlns:p14="http://schemas.microsoft.com/office/powerpoint/2010/main" val="3713628123"/>
       </p:ext>
     </p:extLst>
   </p:cSld>
@@ -4719,6 +5269,28 @@
 <file path=ppt/slides/slide7.xml><?xml version="1.0" encoding="utf-8"?>
 <p:sld xmlns:a="http://schemas.openxmlformats.org/drawingml/2006/main" xmlns:r="http://schemas.openxmlformats.org/officeDocument/2006/relationships" xmlns:p="http://schemas.openxmlformats.org/presentationml/2006/main">
   <p:cSld>
+    <p:bg>
+      <p:bgPr>
+        <a:gradFill>
+          <a:gsLst>
+            <a:gs pos="0">
+              <a:schemeClr val="accent1">
+                <a:lumMod val="5000"/>
+                <a:lumOff val="95000"/>
+              </a:schemeClr>
+            </a:gs>
+            <a:gs pos="100000">
+              <a:schemeClr val="accent1">
+                <a:lumMod val="40000"/>
+                <a:lumOff val="60000"/>
+              </a:schemeClr>
+            </a:gs>
+          </a:gsLst>
+          <a:lin ang="5400000" scaled="1"/>
+        </a:gradFill>
+        <a:effectLst/>
+      </p:bgPr>
+    </p:bg>
     <p:spTree>
       <p:nvGrpSpPr>
         <p:cNvPr id="1" name=""/>
@@ -4733,36 +5305,6 @@
           <a:chExt cx="0" cy="0"/>
         </a:xfrm>
       </p:grpSpPr>
-      <p:pic>
-        <p:nvPicPr>
-          <p:cNvPr id="3" name="Image 2"/>
-          <p:cNvPicPr>
-            <a:picLocks noChangeAspect="1"/>
-          </p:cNvPicPr>
-          <p:nvPr/>
-        </p:nvPicPr>
-        <p:blipFill>
-          <a:blip r:embed="rId2">
-            <a:extLst>
-              <a:ext uri="{28A0092B-C50C-407E-A947-70E740481C1C}">
-                <a14:useLocalDpi xmlns:a14="http://schemas.microsoft.com/office/drawing/2010/main" val="0"/>
-              </a:ext>
-            </a:extLst>
-          </a:blip>
-          <a:stretch>
-            <a:fillRect/>
-          </a:stretch>
-        </p:blipFill>
-        <p:spPr>
-          <a:xfrm>
-            <a:off x="2081693" y="1204064"/>
-            <a:ext cx="8278995" cy="4767400"/>
-          </a:xfrm>
-          <a:prstGeom prst="rect">
-            <a:avLst/>
-          </a:prstGeom>
-        </p:spPr>
-      </p:pic>
       <p:sp>
         <p:nvSpPr>
           <p:cNvPr id="4" name="ZoneTexte 3"/>
@@ -4771,7 +5313,7 @@
         </p:nvSpPr>
         <p:spPr>
           <a:xfrm>
-            <a:off x="3276600" y="571500"/>
+            <a:off x="3471350" y="292952"/>
             <a:ext cx="8362950" cy="769441"/>
           </a:xfrm>
           <a:prstGeom prst="rect">
@@ -4810,7 +5352,7 @@
         </p:nvSpPr>
         <p:spPr>
           <a:xfrm>
-            <a:off x="4283902" y="6150279"/>
+            <a:off x="4378443" y="5839573"/>
             <a:ext cx="7455857" cy="584775"/>
           </a:xfrm>
           <a:prstGeom prst="rect">
@@ -4837,6 +5379,495 @@
           </a:p>
         </p:txBody>
       </p:sp>
+      <p:sp>
+        <p:nvSpPr>
+          <p:cNvPr id="6" name="Ellipse 5"/>
+          <p:cNvSpPr/>
+          <p:nvPr/>
+        </p:nvSpPr>
+        <p:spPr>
+          <a:xfrm>
+            <a:off x="4543865" y="2278966"/>
+            <a:ext cx="2827606" cy="1561514"/>
+          </a:xfrm>
+          <a:prstGeom prst="ellipse">
+            <a:avLst/>
+          </a:prstGeom>
+          <a:ln>
+            <a:noFill/>
+          </a:ln>
+          <a:effectLst>
+            <a:glow rad="101600">
+              <a:schemeClr val="accent3">
+                <a:satMod val="175000"/>
+                <a:alpha val="40000"/>
+              </a:schemeClr>
+            </a:glow>
+          </a:effectLst>
+          <a:scene3d>
+            <a:camera prst="orthographicFront">
+              <a:rot lat="0" lon="0" rev="0"/>
+            </a:camera>
+            <a:lightRig rig="chilly" dir="t">
+              <a:rot lat="0" lon="0" rev="18480000"/>
+            </a:lightRig>
+          </a:scene3d>
+          <a:sp3d prstMaterial="clear">
+            <a:bevelT h="63500"/>
+          </a:sp3d>
+        </p:spPr>
+        <p:style>
+          <a:lnRef idx="1">
+            <a:schemeClr val="dk1"/>
+          </a:lnRef>
+          <a:fillRef idx="2">
+            <a:schemeClr val="dk1"/>
+          </a:fillRef>
+          <a:effectRef idx="1">
+            <a:schemeClr val="dk1"/>
+          </a:effectRef>
+          <a:fontRef idx="minor">
+            <a:schemeClr val="dk1"/>
+          </a:fontRef>
+        </p:style>
+        <p:txBody>
+          <a:bodyPr rtlCol="1" anchor="ctr"/>
+          <a:lstStyle/>
+          <a:p>
+            <a:pPr algn="ctr" rtl="1"/>
+            <a:r>
+              <a:rPr lang="ar-DZ" sz="3200" b="1" dirty="0" smtClean="0">
+                <a:latin typeface="Andalus" panose="02020603050405020304" pitchFamily="18" charset="-78"/>
+                <a:cs typeface="+mj-cs"/>
+              </a:rPr>
+              <a:t>واجهة ال </a:t>
+            </a:r>
+            <a:r>
+              <a:rPr lang="fr-FR" sz="3200" b="1" dirty="0" smtClean="0">
+                <a:latin typeface="Andalus" panose="02020603050405020304" pitchFamily="18" charset="-78"/>
+                <a:cs typeface="+mj-cs"/>
+              </a:rPr>
+              <a:t>Windows</a:t>
+            </a:r>
+            <a:endParaRPr lang="ar-DZ" sz="3200" b="1" dirty="0">
+              <a:latin typeface="Andalus" panose="02020603050405020304" pitchFamily="18" charset="-78"/>
+              <a:cs typeface="+mj-cs"/>
+            </a:endParaRPr>
+          </a:p>
+        </p:txBody>
+      </p:sp>
+      <p:sp>
+        <p:nvSpPr>
+          <p:cNvPr id="10" name="Rectangle 9"/>
+          <p:cNvSpPr/>
+          <p:nvPr/>
+        </p:nvSpPr>
+        <p:spPr>
+          <a:xfrm>
+            <a:off x="4712677" y="4476597"/>
+            <a:ext cx="2489981" cy="606009"/>
+          </a:xfrm>
+          <a:prstGeom prst="rect">
+            <a:avLst/>
+          </a:prstGeom>
+        </p:spPr>
+        <p:style>
+          <a:lnRef idx="2">
+            <a:schemeClr val="dk1"/>
+          </a:lnRef>
+          <a:fillRef idx="1">
+            <a:schemeClr val="lt1"/>
+          </a:fillRef>
+          <a:effectRef idx="0">
+            <a:schemeClr val="dk1"/>
+          </a:effectRef>
+          <a:fontRef idx="minor">
+            <a:schemeClr val="dk1"/>
+          </a:fontRef>
+        </p:style>
+        <p:txBody>
+          <a:bodyPr rtlCol="1" anchor="ctr"/>
+          <a:lstStyle/>
+          <a:p>
+            <a:pPr algn="ctr"/>
+            <a:r>
+              <a:rPr lang="ar-DZ" sz="3200" b="1" dirty="0" smtClean="0">
+                <a:latin typeface="Bahnschrift" panose="020B0502040204020203" pitchFamily="34" charset="0"/>
+                <a:cs typeface="+mj-cs"/>
+              </a:rPr>
+              <a:t>شريط المهام</a:t>
+            </a:r>
+            <a:endParaRPr lang="ar-DZ" sz="3200" b="1" dirty="0">
+              <a:latin typeface="Bahnschrift" panose="020B0502040204020203" pitchFamily="34" charset="0"/>
+              <a:cs typeface="+mj-cs"/>
+            </a:endParaRPr>
+          </a:p>
+        </p:txBody>
+      </p:sp>
+      <p:sp>
+        <p:nvSpPr>
+          <p:cNvPr id="12" name="Rectangle 11"/>
+          <p:cNvSpPr/>
+          <p:nvPr/>
+        </p:nvSpPr>
+        <p:spPr>
+          <a:xfrm>
+            <a:off x="1850464" y="3656879"/>
+            <a:ext cx="2489981" cy="606009"/>
+          </a:xfrm>
+          <a:prstGeom prst="rect">
+            <a:avLst/>
+          </a:prstGeom>
+        </p:spPr>
+        <p:style>
+          <a:lnRef idx="2">
+            <a:schemeClr val="dk1"/>
+          </a:lnRef>
+          <a:fillRef idx="1">
+            <a:schemeClr val="lt1"/>
+          </a:fillRef>
+          <a:effectRef idx="0">
+            <a:schemeClr val="dk1"/>
+          </a:effectRef>
+          <a:fontRef idx="minor">
+            <a:schemeClr val="dk1"/>
+          </a:fontRef>
+        </p:style>
+        <p:txBody>
+          <a:bodyPr rtlCol="1" anchor="ctr"/>
+          <a:lstStyle/>
+          <a:p>
+            <a:pPr algn="ctr"/>
+            <a:r>
+              <a:rPr lang="ar-DZ" sz="3200" b="1" dirty="0" smtClean="0">
+                <a:latin typeface="Bahnschrift" panose="020B0502040204020203" pitchFamily="34" charset="0"/>
+                <a:cs typeface="+mj-cs"/>
+              </a:rPr>
+              <a:t>النافذة</a:t>
+            </a:r>
+            <a:endParaRPr lang="ar-DZ" sz="3200" b="1" dirty="0">
+              <a:latin typeface="Bahnschrift" panose="020B0502040204020203" pitchFamily="34" charset="0"/>
+              <a:cs typeface="+mj-cs"/>
+            </a:endParaRPr>
+          </a:p>
+        </p:txBody>
+      </p:sp>
+      <p:sp>
+        <p:nvSpPr>
+          <p:cNvPr id="13" name="Rectangle 12"/>
+          <p:cNvSpPr/>
+          <p:nvPr/>
+        </p:nvSpPr>
+        <p:spPr>
+          <a:xfrm>
+            <a:off x="7510093" y="3537475"/>
+            <a:ext cx="2489981" cy="606009"/>
+          </a:xfrm>
+          <a:prstGeom prst="rect">
+            <a:avLst/>
+          </a:prstGeom>
+        </p:spPr>
+        <p:style>
+          <a:lnRef idx="2">
+            <a:schemeClr val="dk1"/>
+          </a:lnRef>
+          <a:fillRef idx="1">
+            <a:schemeClr val="lt1"/>
+          </a:fillRef>
+          <a:effectRef idx="0">
+            <a:schemeClr val="dk1"/>
+          </a:effectRef>
+          <a:fontRef idx="minor">
+            <a:schemeClr val="dk1"/>
+          </a:fontRef>
+        </p:style>
+        <p:txBody>
+          <a:bodyPr rtlCol="1" anchor="ctr"/>
+          <a:lstStyle/>
+          <a:p>
+            <a:pPr algn="ctr"/>
+            <a:r>
+              <a:rPr lang="ar-DZ" sz="3200" b="1" dirty="0" smtClean="0">
+                <a:latin typeface="Bahnschrift" panose="020B0502040204020203" pitchFamily="34" charset="0"/>
+                <a:cs typeface="+mj-cs"/>
+              </a:rPr>
+              <a:t>الأيقونات</a:t>
+            </a:r>
+            <a:endParaRPr lang="ar-DZ" sz="3200" b="1" dirty="0">
+              <a:latin typeface="Bahnschrift" panose="020B0502040204020203" pitchFamily="34" charset="0"/>
+              <a:cs typeface="+mj-cs"/>
+            </a:endParaRPr>
+          </a:p>
+        </p:txBody>
+      </p:sp>
+      <p:sp>
+        <p:nvSpPr>
+          <p:cNvPr id="14" name="Rectangle 13"/>
+          <p:cNvSpPr/>
+          <p:nvPr/>
+        </p:nvSpPr>
+        <p:spPr>
+          <a:xfrm>
+            <a:off x="2053884" y="1541855"/>
+            <a:ext cx="2489981" cy="606009"/>
+          </a:xfrm>
+          <a:prstGeom prst="rect">
+            <a:avLst/>
+          </a:prstGeom>
+        </p:spPr>
+        <p:style>
+          <a:lnRef idx="2">
+            <a:schemeClr val="dk1"/>
+          </a:lnRef>
+          <a:fillRef idx="1">
+            <a:schemeClr val="lt1"/>
+          </a:fillRef>
+          <a:effectRef idx="0">
+            <a:schemeClr val="dk1"/>
+          </a:effectRef>
+          <a:fontRef idx="minor">
+            <a:schemeClr val="dk1"/>
+          </a:fontRef>
+        </p:style>
+        <p:txBody>
+          <a:bodyPr rtlCol="1" anchor="ctr"/>
+          <a:lstStyle/>
+          <a:p>
+            <a:pPr algn="ctr"/>
+            <a:r>
+              <a:rPr lang="ar-DZ" sz="3200" b="1" dirty="0" smtClean="0">
+                <a:latin typeface="Bahnschrift" panose="020B0502040204020203" pitchFamily="34" charset="0"/>
+                <a:cs typeface="+mj-cs"/>
+              </a:rPr>
+              <a:t>علبة الحوار</a:t>
+            </a:r>
+            <a:endParaRPr lang="ar-DZ" sz="3200" b="1" dirty="0">
+              <a:latin typeface="Bahnschrift" panose="020B0502040204020203" pitchFamily="34" charset="0"/>
+              <a:cs typeface="+mj-cs"/>
+            </a:endParaRPr>
+          </a:p>
+        </p:txBody>
+      </p:sp>
+      <p:sp>
+        <p:nvSpPr>
+          <p:cNvPr id="15" name="Rectangle 14"/>
+          <p:cNvSpPr/>
+          <p:nvPr/>
+        </p:nvSpPr>
+        <p:spPr>
+          <a:xfrm>
+            <a:off x="7371471" y="1541855"/>
+            <a:ext cx="2489981" cy="606009"/>
+          </a:xfrm>
+          <a:prstGeom prst="rect">
+            <a:avLst/>
+          </a:prstGeom>
+        </p:spPr>
+        <p:style>
+          <a:lnRef idx="2">
+            <a:schemeClr val="dk1"/>
+          </a:lnRef>
+          <a:fillRef idx="1">
+            <a:schemeClr val="lt1"/>
+          </a:fillRef>
+          <a:effectRef idx="0">
+            <a:schemeClr val="dk1"/>
+          </a:effectRef>
+          <a:fontRef idx="minor">
+            <a:schemeClr val="dk1"/>
+          </a:fontRef>
+        </p:style>
+        <p:txBody>
+          <a:bodyPr rtlCol="1" anchor="ctr"/>
+          <a:lstStyle/>
+          <a:p>
+            <a:pPr algn="ctr"/>
+            <a:r>
+              <a:rPr lang="ar-DZ" sz="3200" b="1" dirty="0" smtClean="0">
+                <a:latin typeface="Bahnschrift" panose="020B0502040204020203" pitchFamily="34" charset="0"/>
+                <a:cs typeface="+mj-cs"/>
+              </a:rPr>
+              <a:t>سطح المكتب</a:t>
+            </a:r>
+            <a:endParaRPr lang="ar-DZ" sz="3200" b="1" dirty="0">
+              <a:latin typeface="Bahnschrift" panose="020B0502040204020203" pitchFamily="34" charset="0"/>
+              <a:cs typeface="+mj-cs"/>
+            </a:endParaRPr>
+          </a:p>
+        </p:txBody>
+      </p:sp>
+      <p:cxnSp>
+        <p:nvCxnSpPr>
+          <p:cNvPr id="17" name="Connecteur droit avec flèche 16"/>
+          <p:cNvCxnSpPr>
+            <a:stCxn id="6" idx="7"/>
+          </p:cNvCxnSpPr>
+          <p:nvPr/>
+        </p:nvCxnSpPr>
+        <p:spPr>
+          <a:xfrm flipV="1">
+            <a:off x="6957378" y="2147864"/>
+            <a:ext cx="414093" cy="359780"/>
+          </a:xfrm>
+          <a:prstGeom prst="straightConnector1">
+            <a:avLst/>
+          </a:prstGeom>
+          <a:ln>
+            <a:tailEnd type="triangle"/>
+          </a:ln>
+        </p:spPr>
+        <p:style>
+          <a:lnRef idx="3">
+            <a:schemeClr val="dk1"/>
+          </a:lnRef>
+          <a:fillRef idx="0">
+            <a:schemeClr val="dk1"/>
+          </a:fillRef>
+          <a:effectRef idx="2">
+            <a:schemeClr val="dk1"/>
+          </a:effectRef>
+          <a:fontRef idx="minor">
+            <a:schemeClr val="tx1"/>
+          </a:fontRef>
+        </p:style>
+      </p:cxnSp>
+      <p:cxnSp>
+        <p:nvCxnSpPr>
+          <p:cNvPr id="19" name="Connecteur droit avec flèche 18"/>
+          <p:cNvCxnSpPr>
+            <a:stCxn id="6" idx="5"/>
+            <a:endCxn id="13" idx="1"/>
+          </p:cNvCxnSpPr>
+          <p:nvPr/>
+        </p:nvCxnSpPr>
+        <p:spPr>
+          <a:xfrm>
+            <a:off x="6957378" y="3611802"/>
+            <a:ext cx="552715" cy="228678"/>
+          </a:xfrm>
+          <a:prstGeom prst="straightConnector1">
+            <a:avLst/>
+          </a:prstGeom>
+          <a:ln>
+            <a:tailEnd type="triangle"/>
+          </a:ln>
+        </p:spPr>
+        <p:style>
+          <a:lnRef idx="3">
+            <a:schemeClr val="dk1"/>
+          </a:lnRef>
+          <a:fillRef idx="0">
+            <a:schemeClr val="dk1"/>
+          </a:fillRef>
+          <a:effectRef idx="2">
+            <a:schemeClr val="dk1"/>
+          </a:effectRef>
+          <a:fontRef idx="minor">
+            <a:schemeClr val="tx1"/>
+          </a:fontRef>
+        </p:style>
+      </p:cxnSp>
+      <p:cxnSp>
+        <p:nvCxnSpPr>
+          <p:cNvPr id="20" name="Connecteur droit avec flèche 19"/>
+          <p:cNvCxnSpPr/>
+          <p:nvPr/>
+        </p:nvCxnSpPr>
+        <p:spPr>
+          <a:xfrm flipH="1" flipV="1">
+            <a:off x="4543865" y="2178263"/>
+            <a:ext cx="329152" cy="368466"/>
+          </a:xfrm>
+          <a:prstGeom prst="straightConnector1">
+            <a:avLst/>
+          </a:prstGeom>
+          <a:ln>
+            <a:tailEnd type="triangle"/>
+          </a:ln>
+        </p:spPr>
+        <p:style>
+          <a:lnRef idx="3">
+            <a:schemeClr val="dk1"/>
+          </a:lnRef>
+          <a:fillRef idx="0">
+            <a:schemeClr val="dk1"/>
+          </a:fillRef>
+          <a:effectRef idx="2">
+            <a:schemeClr val="dk1"/>
+          </a:effectRef>
+          <a:fontRef idx="minor">
+            <a:schemeClr val="tx1"/>
+          </a:fontRef>
+        </p:style>
+      </p:cxnSp>
+      <p:cxnSp>
+        <p:nvCxnSpPr>
+          <p:cNvPr id="21" name="Connecteur droit avec flèche 20"/>
+          <p:cNvCxnSpPr>
+            <a:endCxn id="10" idx="0"/>
+          </p:cNvCxnSpPr>
+          <p:nvPr/>
+        </p:nvCxnSpPr>
+        <p:spPr>
+          <a:xfrm>
+            <a:off x="5956904" y="3840480"/>
+            <a:ext cx="764" cy="636117"/>
+          </a:xfrm>
+          <a:prstGeom prst="straightConnector1">
+            <a:avLst/>
+          </a:prstGeom>
+          <a:ln>
+            <a:tailEnd type="triangle"/>
+          </a:ln>
+        </p:spPr>
+        <p:style>
+          <a:lnRef idx="3">
+            <a:schemeClr val="dk1"/>
+          </a:lnRef>
+          <a:fillRef idx="0">
+            <a:schemeClr val="dk1"/>
+          </a:fillRef>
+          <a:effectRef idx="2">
+            <a:schemeClr val="dk1"/>
+          </a:effectRef>
+          <a:fontRef idx="minor">
+            <a:schemeClr val="tx1"/>
+          </a:fontRef>
+        </p:style>
+      </p:cxnSp>
+      <p:cxnSp>
+        <p:nvCxnSpPr>
+          <p:cNvPr id="25" name="Connecteur droit avec flèche 24"/>
+          <p:cNvCxnSpPr/>
+          <p:nvPr/>
+        </p:nvCxnSpPr>
+        <p:spPr>
+          <a:xfrm flipH="1">
+            <a:off x="4340445" y="3385301"/>
+            <a:ext cx="372233" cy="271578"/>
+          </a:xfrm>
+          <a:prstGeom prst="straightConnector1">
+            <a:avLst/>
+          </a:prstGeom>
+          <a:ln>
+            <a:tailEnd type="triangle"/>
+          </a:ln>
+        </p:spPr>
+        <p:style>
+          <a:lnRef idx="3">
+            <a:schemeClr val="dk1"/>
+          </a:lnRef>
+          <a:fillRef idx="0">
+            <a:schemeClr val="dk1"/>
+          </a:fillRef>
+          <a:effectRef idx="2">
+            <a:schemeClr val="dk1"/>
+          </a:effectRef>
+          <a:fontRef idx="minor">
+            <a:schemeClr val="tx1"/>
+          </a:fontRef>
+        </p:style>
+      </p:cxnSp>
     </p:spTree>
     <p:extLst>
       <p:ext uri="{BB962C8B-B14F-4D97-AF65-F5344CB8AC3E}">
@@ -4853,9 +5884,536 @@
   <p:timing>
     <p:tnLst>
       <p:par>
-        <p:cTn id="1" dur="indefinite" restart="never" nodeType="tmRoot"/>
+        <p:cTn id="1" dur="indefinite" restart="never" nodeType="tmRoot">
+          <p:childTnLst>
+            <p:seq concurrent="1" nextAc="seek">
+              <p:cTn id="2" dur="indefinite" nodeType="mainSeq">
+                <p:childTnLst>
+                  <p:par>
+                    <p:cTn id="3" fill="hold">
+                      <p:stCondLst>
+                        <p:cond delay="indefinite"/>
+                        <p:cond evt="onBegin" delay="0">
+                          <p:tn val="2"/>
+                        </p:cond>
+                      </p:stCondLst>
+                      <p:childTnLst>
+                        <p:par>
+                          <p:cTn id="4" fill="hold">
+                            <p:stCondLst>
+                              <p:cond delay="0"/>
+                            </p:stCondLst>
+                            <p:childTnLst>
+                              <p:par>
+                                <p:cTn id="5" presetID="10" presetClass="entr" presetSubtype="0" fill="hold" grpId="0" nodeType="withEffect">
+                                  <p:stCondLst>
+                                    <p:cond delay="0"/>
+                                  </p:stCondLst>
+                                  <p:childTnLst>
+                                    <p:set>
+                                      <p:cBhvr>
+                                        <p:cTn id="6" dur="1" fill="hold">
+                                          <p:stCondLst>
+                                            <p:cond delay="0"/>
+                                          </p:stCondLst>
+                                        </p:cTn>
+                                        <p:tgtEl>
+                                          <p:spTgt spid="6"/>
+                                        </p:tgtEl>
+                                        <p:attrNameLst>
+                                          <p:attrName>style.visibility</p:attrName>
+                                        </p:attrNameLst>
+                                      </p:cBhvr>
+                                      <p:to>
+                                        <p:strVal val="visible"/>
+                                      </p:to>
+                                    </p:set>
+                                    <p:animEffect transition="in" filter="fade">
+                                      <p:cBhvr>
+                                        <p:cTn id="7" dur="500"/>
+                                        <p:tgtEl>
+                                          <p:spTgt spid="6"/>
+                                        </p:tgtEl>
+                                      </p:cBhvr>
+                                    </p:animEffect>
+                                  </p:childTnLst>
+                                </p:cTn>
+                              </p:par>
+                            </p:childTnLst>
+                          </p:cTn>
+                        </p:par>
+                      </p:childTnLst>
+                    </p:cTn>
+                  </p:par>
+                  <p:par>
+                    <p:cTn id="8" fill="hold">
+                      <p:stCondLst>
+                        <p:cond delay="indefinite"/>
+                      </p:stCondLst>
+                      <p:childTnLst>
+                        <p:par>
+                          <p:cTn id="9" fill="hold">
+                            <p:stCondLst>
+                              <p:cond delay="0"/>
+                            </p:stCondLst>
+                            <p:childTnLst>
+                              <p:par>
+                                <p:cTn id="10" presetID="10" presetClass="entr" presetSubtype="0" fill="hold" grpId="0" nodeType="clickEffect">
+                                  <p:stCondLst>
+                                    <p:cond delay="0"/>
+                                  </p:stCondLst>
+                                  <p:childTnLst>
+                                    <p:set>
+                                      <p:cBhvr>
+                                        <p:cTn id="11" dur="1" fill="hold">
+                                          <p:stCondLst>
+                                            <p:cond delay="0"/>
+                                          </p:stCondLst>
+                                        </p:cTn>
+                                        <p:tgtEl>
+                                          <p:spTgt spid="15"/>
+                                        </p:tgtEl>
+                                        <p:attrNameLst>
+                                          <p:attrName>style.visibility</p:attrName>
+                                        </p:attrNameLst>
+                                      </p:cBhvr>
+                                      <p:to>
+                                        <p:strVal val="visible"/>
+                                      </p:to>
+                                    </p:set>
+                                    <p:animEffect transition="in" filter="fade">
+                                      <p:cBhvr>
+                                        <p:cTn id="12" dur="500"/>
+                                        <p:tgtEl>
+                                          <p:spTgt spid="15"/>
+                                        </p:tgtEl>
+                                      </p:cBhvr>
+                                    </p:animEffect>
+                                  </p:childTnLst>
+                                </p:cTn>
+                              </p:par>
+                              <p:par>
+                                <p:cTn id="13" presetID="10" presetClass="entr" presetSubtype="0" fill="hold" nodeType="withEffect">
+                                  <p:stCondLst>
+                                    <p:cond delay="0"/>
+                                  </p:stCondLst>
+                                  <p:childTnLst>
+                                    <p:set>
+                                      <p:cBhvr>
+                                        <p:cTn id="14" dur="1" fill="hold">
+                                          <p:stCondLst>
+                                            <p:cond delay="0"/>
+                                          </p:stCondLst>
+                                        </p:cTn>
+                                        <p:tgtEl>
+                                          <p:spTgt spid="17"/>
+                                        </p:tgtEl>
+                                        <p:attrNameLst>
+                                          <p:attrName>style.visibility</p:attrName>
+                                        </p:attrNameLst>
+                                      </p:cBhvr>
+                                      <p:to>
+                                        <p:strVal val="visible"/>
+                                      </p:to>
+                                    </p:set>
+                                    <p:animEffect transition="in" filter="fade">
+                                      <p:cBhvr>
+                                        <p:cTn id="15" dur="500"/>
+                                        <p:tgtEl>
+                                          <p:spTgt spid="17"/>
+                                        </p:tgtEl>
+                                      </p:cBhvr>
+                                    </p:animEffect>
+                                  </p:childTnLst>
+                                </p:cTn>
+                              </p:par>
+                            </p:childTnLst>
+                          </p:cTn>
+                        </p:par>
+                      </p:childTnLst>
+                    </p:cTn>
+                  </p:par>
+                  <p:par>
+                    <p:cTn id="16" fill="hold">
+                      <p:stCondLst>
+                        <p:cond delay="indefinite"/>
+                      </p:stCondLst>
+                      <p:childTnLst>
+                        <p:par>
+                          <p:cTn id="17" fill="hold">
+                            <p:stCondLst>
+                              <p:cond delay="0"/>
+                            </p:stCondLst>
+                            <p:childTnLst>
+                              <p:par>
+                                <p:cTn id="18" presetID="10" presetClass="entr" presetSubtype="0" fill="hold" nodeType="clickEffect">
+                                  <p:stCondLst>
+                                    <p:cond delay="0"/>
+                                  </p:stCondLst>
+                                  <p:childTnLst>
+                                    <p:set>
+                                      <p:cBhvr>
+                                        <p:cTn id="19" dur="1" fill="hold">
+                                          <p:stCondLst>
+                                            <p:cond delay="0"/>
+                                          </p:stCondLst>
+                                        </p:cTn>
+                                        <p:tgtEl>
+                                          <p:spTgt spid="19"/>
+                                        </p:tgtEl>
+                                        <p:attrNameLst>
+                                          <p:attrName>style.visibility</p:attrName>
+                                        </p:attrNameLst>
+                                      </p:cBhvr>
+                                      <p:to>
+                                        <p:strVal val="visible"/>
+                                      </p:to>
+                                    </p:set>
+                                    <p:animEffect transition="in" filter="fade">
+                                      <p:cBhvr>
+                                        <p:cTn id="20" dur="500"/>
+                                        <p:tgtEl>
+                                          <p:spTgt spid="19"/>
+                                        </p:tgtEl>
+                                      </p:cBhvr>
+                                    </p:animEffect>
+                                  </p:childTnLst>
+                                </p:cTn>
+                              </p:par>
+                              <p:par>
+                                <p:cTn id="21" presetID="10" presetClass="entr" presetSubtype="0" fill="hold" grpId="0" nodeType="withEffect">
+                                  <p:stCondLst>
+                                    <p:cond delay="0"/>
+                                  </p:stCondLst>
+                                  <p:childTnLst>
+                                    <p:set>
+                                      <p:cBhvr>
+                                        <p:cTn id="22" dur="1" fill="hold">
+                                          <p:stCondLst>
+                                            <p:cond delay="0"/>
+                                          </p:stCondLst>
+                                        </p:cTn>
+                                        <p:tgtEl>
+                                          <p:spTgt spid="13"/>
+                                        </p:tgtEl>
+                                        <p:attrNameLst>
+                                          <p:attrName>style.visibility</p:attrName>
+                                        </p:attrNameLst>
+                                      </p:cBhvr>
+                                      <p:to>
+                                        <p:strVal val="visible"/>
+                                      </p:to>
+                                    </p:set>
+                                    <p:animEffect transition="in" filter="fade">
+                                      <p:cBhvr>
+                                        <p:cTn id="23" dur="500"/>
+                                        <p:tgtEl>
+                                          <p:spTgt spid="13"/>
+                                        </p:tgtEl>
+                                      </p:cBhvr>
+                                    </p:animEffect>
+                                  </p:childTnLst>
+                                </p:cTn>
+                              </p:par>
+                            </p:childTnLst>
+                          </p:cTn>
+                        </p:par>
+                      </p:childTnLst>
+                    </p:cTn>
+                  </p:par>
+                  <p:par>
+                    <p:cTn id="24" fill="hold">
+                      <p:stCondLst>
+                        <p:cond delay="indefinite"/>
+                      </p:stCondLst>
+                      <p:childTnLst>
+                        <p:par>
+                          <p:cTn id="25" fill="hold">
+                            <p:stCondLst>
+                              <p:cond delay="0"/>
+                            </p:stCondLst>
+                            <p:childTnLst>
+                              <p:par>
+                                <p:cTn id="26" presetID="10" presetClass="entr" presetSubtype="0" fill="hold" nodeType="clickEffect">
+                                  <p:stCondLst>
+                                    <p:cond delay="0"/>
+                                  </p:stCondLst>
+                                  <p:childTnLst>
+                                    <p:set>
+                                      <p:cBhvr>
+                                        <p:cTn id="27" dur="1" fill="hold">
+                                          <p:stCondLst>
+                                            <p:cond delay="0"/>
+                                          </p:stCondLst>
+                                        </p:cTn>
+                                        <p:tgtEl>
+                                          <p:spTgt spid="21"/>
+                                        </p:tgtEl>
+                                        <p:attrNameLst>
+                                          <p:attrName>style.visibility</p:attrName>
+                                        </p:attrNameLst>
+                                      </p:cBhvr>
+                                      <p:to>
+                                        <p:strVal val="visible"/>
+                                      </p:to>
+                                    </p:set>
+                                    <p:animEffect transition="in" filter="fade">
+                                      <p:cBhvr>
+                                        <p:cTn id="28" dur="500"/>
+                                        <p:tgtEl>
+                                          <p:spTgt spid="21"/>
+                                        </p:tgtEl>
+                                      </p:cBhvr>
+                                    </p:animEffect>
+                                  </p:childTnLst>
+                                </p:cTn>
+                              </p:par>
+                              <p:par>
+                                <p:cTn id="29" presetID="10" presetClass="entr" presetSubtype="0" fill="hold" grpId="0" nodeType="withEffect">
+                                  <p:stCondLst>
+                                    <p:cond delay="0"/>
+                                  </p:stCondLst>
+                                  <p:childTnLst>
+                                    <p:set>
+                                      <p:cBhvr>
+                                        <p:cTn id="30" dur="1" fill="hold">
+                                          <p:stCondLst>
+                                            <p:cond delay="0"/>
+                                          </p:stCondLst>
+                                        </p:cTn>
+                                        <p:tgtEl>
+                                          <p:spTgt spid="10"/>
+                                        </p:tgtEl>
+                                        <p:attrNameLst>
+                                          <p:attrName>style.visibility</p:attrName>
+                                        </p:attrNameLst>
+                                      </p:cBhvr>
+                                      <p:to>
+                                        <p:strVal val="visible"/>
+                                      </p:to>
+                                    </p:set>
+                                    <p:animEffect transition="in" filter="fade">
+                                      <p:cBhvr>
+                                        <p:cTn id="31" dur="500"/>
+                                        <p:tgtEl>
+                                          <p:spTgt spid="10"/>
+                                        </p:tgtEl>
+                                      </p:cBhvr>
+                                    </p:animEffect>
+                                  </p:childTnLst>
+                                </p:cTn>
+                              </p:par>
+                            </p:childTnLst>
+                          </p:cTn>
+                        </p:par>
+                      </p:childTnLst>
+                    </p:cTn>
+                  </p:par>
+                  <p:par>
+                    <p:cTn id="32" fill="hold">
+                      <p:stCondLst>
+                        <p:cond delay="indefinite"/>
+                      </p:stCondLst>
+                      <p:childTnLst>
+                        <p:par>
+                          <p:cTn id="33" fill="hold">
+                            <p:stCondLst>
+                              <p:cond delay="0"/>
+                            </p:stCondLst>
+                            <p:childTnLst>
+                              <p:par>
+                                <p:cTn id="34" presetID="10" presetClass="entr" presetSubtype="0" fill="hold" nodeType="clickEffect">
+                                  <p:stCondLst>
+                                    <p:cond delay="0"/>
+                                  </p:stCondLst>
+                                  <p:childTnLst>
+                                    <p:set>
+                                      <p:cBhvr>
+                                        <p:cTn id="35" dur="1" fill="hold">
+                                          <p:stCondLst>
+                                            <p:cond delay="0"/>
+                                          </p:stCondLst>
+                                        </p:cTn>
+                                        <p:tgtEl>
+                                          <p:spTgt spid="25"/>
+                                        </p:tgtEl>
+                                        <p:attrNameLst>
+                                          <p:attrName>style.visibility</p:attrName>
+                                        </p:attrNameLst>
+                                      </p:cBhvr>
+                                      <p:to>
+                                        <p:strVal val="visible"/>
+                                      </p:to>
+                                    </p:set>
+                                    <p:animEffect transition="in" filter="fade">
+                                      <p:cBhvr>
+                                        <p:cTn id="36" dur="500"/>
+                                        <p:tgtEl>
+                                          <p:spTgt spid="25"/>
+                                        </p:tgtEl>
+                                      </p:cBhvr>
+                                    </p:animEffect>
+                                  </p:childTnLst>
+                                </p:cTn>
+                              </p:par>
+                              <p:par>
+                                <p:cTn id="37" presetID="10" presetClass="entr" presetSubtype="0" fill="hold" grpId="0" nodeType="withEffect">
+                                  <p:stCondLst>
+                                    <p:cond delay="0"/>
+                                  </p:stCondLst>
+                                  <p:childTnLst>
+                                    <p:set>
+                                      <p:cBhvr>
+                                        <p:cTn id="38" dur="1" fill="hold">
+                                          <p:stCondLst>
+                                            <p:cond delay="0"/>
+                                          </p:stCondLst>
+                                        </p:cTn>
+                                        <p:tgtEl>
+                                          <p:spTgt spid="12"/>
+                                        </p:tgtEl>
+                                        <p:attrNameLst>
+                                          <p:attrName>style.visibility</p:attrName>
+                                        </p:attrNameLst>
+                                      </p:cBhvr>
+                                      <p:to>
+                                        <p:strVal val="visible"/>
+                                      </p:to>
+                                    </p:set>
+                                    <p:animEffect transition="in" filter="fade">
+                                      <p:cBhvr>
+                                        <p:cTn id="39" dur="500"/>
+                                        <p:tgtEl>
+                                          <p:spTgt spid="12"/>
+                                        </p:tgtEl>
+                                      </p:cBhvr>
+                                    </p:animEffect>
+                                  </p:childTnLst>
+                                </p:cTn>
+                              </p:par>
+                            </p:childTnLst>
+                          </p:cTn>
+                        </p:par>
+                      </p:childTnLst>
+                    </p:cTn>
+                  </p:par>
+                  <p:par>
+                    <p:cTn id="40" fill="hold">
+                      <p:stCondLst>
+                        <p:cond delay="indefinite"/>
+                      </p:stCondLst>
+                      <p:childTnLst>
+                        <p:par>
+                          <p:cTn id="41" fill="hold">
+                            <p:stCondLst>
+                              <p:cond delay="0"/>
+                            </p:stCondLst>
+                            <p:childTnLst>
+                              <p:par>
+                                <p:cTn id="42" presetID="10" presetClass="entr" presetSubtype="0" fill="hold" nodeType="clickEffect">
+                                  <p:stCondLst>
+                                    <p:cond delay="0"/>
+                                  </p:stCondLst>
+                                  <p:childTnLst>
+                                    <p:set>
+                                      <p:cBhvr>
+                                        <p:cTn id="43" dur="1" fill="hold">
+                                          <p:stCondLst>
+                                            <p:cond delay="0"/>
+                                          </p:stCondLst>
+                                        </p:cTn>
+                                        <p:tgtEl>
+                                          <p:spTgt spid="20"/>
+                                        </p:tgtEl>
+                                        <p:attrNameLst>
+                                          <p:attrName>style.visibility</p:attrName>
+                                        </p:attrNameLst>
+                                      </p:cBhvr>
+                                      <p:to>
+                                        <p:strVal val="visible"/>
+                                      </p:to>
+                                    </p:set>
+                                    <p:animEffect transition="in" filter="fade">
+                                      <p:cBhvr>
+                                        <p:cTn id="44" dur="500"/>
+                                        <p:tgtEl>
+                                          <p:spTgt spid="20"/>
+                                        </p:tgtEl>
+                                      </p:cBhvr>
+                                    </p:animEffect>
+                                  </p:childTnLst>
+                                </p:cTn>
+                              </p:par>
+                              <p:par>
+                                <p:cTn id="45" presetID="10" presetClass="entr" presetSubtype="0" fill="hold" grpId="0" nodeType="withEffect">
+                                  <p:stCondLst>
+                                    <p:cond delay="0"/>
+                                  </p:stCondLst>
+                                  <p:childTnLst>
+                                    <p:set>
+                                      <p:cBhvr>
+                                        <p:cTn id="46" dur="1" fill="hold">
+                                          <p:stCondLst>
+                                            <p:cond delay="0"/>
+                                          </p:stCondLst>
+                                        </p:cTn>
+                                        <p:tgtEl>
+                                          <p:spTgt spid="14"/>
+                                        </p:tgtEl>
+                                        <p:attrNameLst>
+                                          <p:attrName>style.visibility</p:attrName>
+                                        </p:attrNameLst>
+                                      </p:cBhvr>
+                                      <p:to>
+                                        <p:strVal val="visible"/>
+                                      </p:to>
+                                    </p:set>
+                                    <p:animEffect transition="in" filter="fade">
+                                      <p:cBhvr>
+                                        <p:cTn id="47" dur="500"/>
+                                        <p:tgtEl>
+                                          <p:spTgt spid="14"/>
+                                        </p:tgtEl>
+                                      </p:cBhvr>
+                                    </p:animEffect>
+                                  </p:childTnLst>
+                                </p:cTn>
+                              </p:par>
+                            </p:childTnLst>
+                          </p:cTn>
+                        </p:par>
+                      </p:childTnLst>
+                    </p:cTn>
+                  </p:par>
+                </p:childTnLst>
+              </p:cTn>
+              <p:prevCondLst>
+                <p:cond evt="onPrev" delay="0">
+                  <p:tgtEl>
+                    <p:sldTgt/>
+                  </p:tgtEl>
+                </p:cond>
+              </p:prevCondLst>
+              <p:nextCondLst>
+                <p:cond evt="onNext" delay="0">
+                  <p:tgtEl>
+                    <p:sldTgt/>
+                  </p:tgtEl>
+                </p:cond>
+              </p:nextCondLst>
+            </p:seq>
+          </p:childTnLst>
+        </p:cTn>
       </p:par>
     </p:tnLst>
+    <p:bldLst>
+      <p:bldP spid="6" grpId="0" animBg="1"/>
+      <p:bldP spid="10" grpId="0" animBg="1"/>
+      <p:bldP spid="12" grpId="0" animBg="1"/>
+      <p:bldP spid="13" grpId="0" animBg="1"/>
+      <p:bldP spid="14" grpId="0" animBg="1"/>
+      <p:bldP spid="15" grpId="0" animBg="1"/>
+    </p:bldLst>
   </p:timing>
 </p:sld>
 </file>

--- a/1 am/2 نظام التشغيل/cours 6/عرض الدرس.pptx
+++ b/1 am/2 نظام التشغيل/cours 6/عرض الدرس.pptx
@@ -249,7 +249,7 @@
           <a:p>
             <a:fld id="{33E46DBA-FA3B-4C5F-B700-4671668DAB72}" type="datetimeFigureOut">
               <a:rPr lang="fr-FR" smtClean="0"/>
-              <a:t>17/01/2025</a:t>
+              <a:t>20/01/2025</a:t>
             </a:fld>
             <a:endParaRPr lang="fr-FR"/>
           </a:p>
@@ -419,7 +419,7 @@
           <a:p>
             <a:fld id="{33E46DBA-FA3B-4C5F-B700-4671668DAB72}" type="datetimeFigureOut">
               <a:rPr lang="fr-FR" smtClean="0"/>
-              <a:t>17/01/2025</a:t>
+              <a:t>20/01/2025</a:t>
             </a:fld>
             <a:endParaRPr lang="fr-FR"/>
           </a:p>
@@ -599,7 +599,7 @@
           <a:p>
             <a:fld id="{33E46DBA-FA3B-4C5F-B700-4671668DAB72}" type="datetimeFigureOut">
               <a:rPr lang="fr-FR" smtClean="0"/>
-              <a:t>17/01/2025</a:t>
+              <a:t>20/01/2025</a:t>
             </a:fld>
             <a:endParaRPr lang="fr-FR"/>
           </a:p>
@@ -769,7 +769,7 @@
           <a:p>
             <a:fld id="{33E46DBA-FA3B-4C5F-B700-4671668DAB72}" type="datetimeFigureOut">
               <a:rPr lang="fr-FR" smtClean="0"/>
-              <a:t>17/01/2025</a:t>
+              <a:t>20/01/2025</a:t>
             </a:fld>
             <a:endParaRPr lang="fr-FR"/>
           </a:p>
@@ -1015,7 +1015,7 @@
           <a:p>
             <a:fld id="{33E46DBA-FA3B-4C5F-B700-4671668DAB72}" type="datetimeFigureOut">
               <a:rPr lang="fr-FR" smtClean="0"/>
-              <a:t>17/01/2025</a:t>
+              <a:t>20/01/2025</a:t>
             </a:fld>
             <a:endParaRPr lang="fr-FR"/>
           </a:p>
@@ -1247,7 +1247,7 @@
           <a:p>
             <a:fld id="{33E46DBA-FA3B-4C5F-B700-4671668DAB72}" type="datetimeFigureOut">
               <a:rPr lang="fr-FR" smtClean="0"/>
-              <a:t>17/01/2025</a:t>
+              <a:t>20/01/2025</a:t>
             </a:fld>
             <a:endParaRPr lang="fr-FR"/>
           </a:p>
@@ -1614,7 +1614,7 @@
           <a:p>
             <a:fld id="{33E46DBA-FA3B-4C5F-B700-4671668DAB72}" type="datetimeFigureOut">
               <a:rPr lang="fr-FR" smtClean="0"/>
-              <a:t>17/01/2025</a:t>
+              <a:t>20/01/2025</a:t>
             </a:fld>
             <a:endParaRPr lang="fr-FR"/>
           </a:p>
@@ -1732,7 +1732,7 @@
           <a:p>
             <a:fld id="{33E46DBA-FA3B-4C5F-B700-4671668DAB72}" type="datetimeFigureOut">
               <a:rPr lang="fr-FR" smtClean="0"/>
-              <a:t>17/01/2025</a:t>
+              <a:t>20/01/2025</a:t>
             </a:fld>
             <a:endParaRPr lang="fr-FR"/>
           </a:p>
@@ -1827,7 +1827,7 @@
           <a:p>
             <a:fld id="{33E46DBA-FA3B-4C5F-B700-4671668DAB72}" type="datetimeFigureOut">
               <a:rPr lang="fr-FR" smtClean="0"/>
-              <a:t>17/01/2025</a:t>
+              <a:t>20/01/2025</a:t>
             </a:fld>
             <a:endParaRPr lang="fr-FR"/>
           </a:p>
@@ -2104,7 +2104,7 @@
           <a:p>
             <a:fld id="{33E46DBA-FA3B-4C5F-B700-4671668DAB72}" type="datetimeFigureOut">
               <a:rPr lang="fr-FR" smtClean="0"/>
-              <a:t>17/01/2025</a:t>
+              <a:t>20/01/2025</a:t>
             </a:fld>
             <a:endParaRPr lang="fr-FR"/>
           </a:p>
@@ -2357,7 +2357,7 @@
           <a:p>
             <a:fld id="{33E46DBA-FA3B-4C5F-B700-4671668DAB72}" type="datetimeFigureOut">
               <a:rPr lang="fr-FR" smtClean="0"/>
-              <a:t>17/01/2025</a:t>
+              <a:t>20/01/2025</a:t>
             </a:fld>
             <a:endParaRPr lang="fr-FR"/>
           </a:p>
@@ -2570,7 +2570,7 @@
           <a:p>
             <a:fld id="{33E46DBA-FA3B-4C5F-B700-4671668DAB72}" type="datetimeFigureOut">
               <a:rPr lang="fr-FR" smtClean="0"/>
-              <a:t>17/01/2025</a:t>
+              <a:t>20/01/2025</a:t>
             </a:fld>
             <a:endParaRPr lang="fr-FR"/>
           </a:p>
@@ -3687,19 +3687,7 @@
                 <a:ea typeface="Times New Roman" panose="02020603050405020304" pitchFamily="18" charset="0"/>
                 <a:cs typeface="Times New Roman" panose="02020603050405020304" pitchFamily="18" charset="0"/>
               </a:rPr>
-              <a:t>نشاط 01 </a:t>
-            </a:r>
-            <a:r>
-              <a:rPr lang="ar-DZ" sz="3200" b="1" u="sng" dirty="0" smtClean="0">
-                <a:solidFill>
-                  <a:srgbClr val="FF0000"/>
-                </a:solidFill>
-                <a:effectLst/>
-                <a:latin typeface="Calibri" panose="020F0502020204030204" pitchFamily="34" charset="0"/>
-                <a:ea typeface="Times New Roman" panose="02020603050405020304" pitchFamily="18" charset="0"/>
-                <a:cs typeface="Times New Roman" panose="02020603050405020304" pitchFamily="18" charset="0"/>
-              </a:rPr>
-              <a:t>:</a:t>
+              <a:t>نشاط 01 :</a:t>
             </a:r>
             <a:endParaRPr lang="fr-FR" sz="3200" dirty="0"/>
           </a:p>
@@ -3745,19 +3733,11 @@
             </a:r>
             <a:r>
               <a:rPr lang="fr-FR" sz="3200" dirty="0" smtClean="0"/>
-              <a:t>Ce </a:t>
-            </a:r>
-            <a:r>
-              <a:rPr lang="fr-FR" sz="3200" dirty="0" smtClean="0"/>
-              <a:t>PC</a:t>
+              <a:t>Ce PC</a:t>
             </a:r>
             <a:r>
               <a:rPr lang="ar-DZ" sz="3200" dirty="0" smtClean="0"/>
-              <a:t> و </a:t>
-            </a:r>
-            <a:r>
-              <a:rPr lang="ar-DZ" sz="3200" dirty="0" smtClean="0"/>
-              <a:t>تمعن فيها جيّدا.</a:t>
+              <a:t> و تمعن فيها جيّدا.</a:t>
             </a:r>
           </a:p>
           <a:p>
@@ -3876,15 +3856,7 @@
             </a:r>
             <a:r>
               <a:rPr lang="ar-DZ" sz="3200" dirty="0" smtClean="0"/>
-              <a:t> و </a:t>
-            </a:r>
-            <a:r>
-              <a:rPr lang="ar-DZ" sz="3200" dirty="0" smtClean="0"/>
-              <a:t>إنشا </a:t>
-            </a:r>
-            <a:r>
-              <a:rPr lang="ar-DZ" sz="3200" dirty="0" smtClean="0"/>
-              <a:t>رسم بسيط لأحد مكونات الحاسوب.</a:t>
+              <a:t> و إنشا رسم بسيط لأحد مكونات الحاسوب.</a:t>
             </a:r>
           </a:p>
           <a:p>
@@ -3988,19 +3960,7 @@
                 <a:ea typeface="Times New Roman" panose="02020603050405020304" pitchFamily="18" charset="0"/>
                 <a:cs typeface="Times New Roman" panose="02020603050405020304" pitchFamily="18" charset="0"/>
               </a:rPr>
-              <a:t>نشاط 02 </a:t>
-            </a:r>
-            <a:r>
-              <a:rPr lang="ar-DZ" sz="3200" b="1" u="sng" dirty="0" smtClean="0">
-                <a:solidFill>
-                  <a:srgbClr val="FF0000"/>
-                </a:solidFill>
-                <a:effectLst/>
-                <a:latin typeface="Calibri" panose="020F0502020204030204" pitchFamily="34" charset="0"/>
-                <a:ea typeface="Times New Roman" panose="02020603050405020304" pitchFamily="18" charset="0"/>
-                <a:cs typeface="Times New Roman" panose="02020603050405020304" pitchFamily="18" charset="0"/>
-              </a:rPr>
-              <a:t>:</a:t>
+              <a:t>نشاط 02 :</a:t>
             </a:r>
             <a:endParaRPr lang="fr-FR" sz="3200" dirty="0"/>
           </a:p>
@@ -5271,23 +5231,9 @@
   <p:cSld>
     <p:bg>
       <p:bgPr>
-        <a:gradFill>
-          <a:gsLst>
-            <a:gs pos="0">
-              <a:schemeClr val="accent1">
-                <a:lumMod val="5000"/>
-                <a:lumOff val="95000"/>
-              </a:schemeClr>
-            </a:gs>
-            <a:gs pos="100000">
-              <a:schemeClr val="accent1">
-                <a:lumMod val="40000"/>
-                <a:lumOff val="60000"/>
-              </a:schemeClr>
-            </a:gs>
-          </a:gsLst>
-          <a:lin ang="5400000" scaled="1"/>
-        </a:gradFill>
+        <a:solidFill>
+          <a:schemeClr val="bg1"/>
+        </a:solidFill>
         <a:effectLst/>
       </p:bgPr>
     </p:bg>
